--- a/curso/pptx/S88.pptx
+++ b/curso/pptx/S88.pptx
@@ -4506,7 +4506,7 @@
                 </a:solidFill>
                 <a:latin typeface="Nunito Sans"/>
               </a:rPr>
-              <a:t>En Aste Nagusia, alguien de la cuadrilla le pasa un vaper a Iker: «Venga, si lo hace todo el mundo». (Ejemplo inventado.)</a:t>
+              <a:t>En Aste Nagusia, alguien de la cuadrilla le pasa un vaper a un chico: «Venga, si lo hace todo el mundo». (Ejemplo inventado.)</a:t>
             </a:r>
           </a:p>
         </p:txBody>
@@ -4937,7 +4937,7 @@
                 </a:solidFill>
                 <a:latin typeface="Nunito Sans"/>
               </a:rPr>
-              <a:t>Chen juega tres horas al Fortnite los sábados con sus primos. Duerme bien, estudia y queda con la cuadrilla. Su tía dice: «Es adicto». (Ejemplo inventado.)</a:t>
+              <a:t>Un chico juega tres horas al Fortnite los sábados con sus primos. Duerme bien, estudia y queda con la cuadrilla. Su tía dice: «Es adicto». (Ejemplo inventado.)</a:t>
             </a:r>
           </a:p>
         </p:txBody>
@@ -5078,7 +5078,7 @@
                 </a:solidFill>
                 <a:latin typeface="Nunito Sans"/>
               </a:rPr>
-              <a:t>Chen elige cuándo jugar y no deja de lado el sueño, los estudios ni a la cuadrilla.</a:t>
+              <a:t>Ese chico elige cuándo jugar y no deja de lado el sueño, los estudios ni a la cuadrilla.</a:t>
             </a:r>
           </a:p>
           <a:p>

--- a/curso/pptx/S88.pptx
+++ b/curso/pptx/S88.pptx
@@ -23,7 +23,6 @@
     <p:sldId id="271" r:id="rId23"/>
     <p:sldId id="272" r:id="rId24"/>
     <p:sldId id="273" r:id="rId25"/>
-    <p:sldId id="274" r:id="rId26"/>
   </p:sldIdLst>
   <p:sldSz cx="12192000" cy="6858000" type="screen4x3"/>
   <p:notesSz cx="6858000" cy="9144000"/>
@@ -3537,7 +3536,7 @@
                 </a:solidFill>
                 <a:latin typeface="Nunito Sans"/>
               </a:rPr>
-              <a:t>PENSAMIENTO CRÍTICO · SESIÓN 88 · UNIDAD 20 · MODAS, OCIO Y FUTURO</a:t>
+              <a:t>PENSAMIENTO CRÍTICO · SESIÓN 88 · UNIDAD 20 · NÚMEROS QUE ENGAÑAN</a:t>
             </a:r>
           </a:p>
         </p:txBody>
@@ -3576,7 +3575,7 @@
                 </a:solidFill>
                 <a:latin typeface="Fredoka"/>
               </a:rPr>
-              <a:t>Ocio, drogas y adicciones</a:t>
+              <a:t>Gráficos engañosos</a:t>
             </a:r>
           </a:p>
         </p:txBody>
@@ -3615,7 +3614,7 @@
                 </a:solidFill>
                 <a:latin typeface="Nunito Sans"/>
               </a:rPr>
-              <a:t>El ocio es tiempo libre elegido; una adicción es perder el control. Ante los mitos sobre drogas, pregunto: ¿cómo lo sabes y quién lo dice?</a:t>
+              <a:t>Un gráfico puede engañar aunque los datos sean verdad: con el eje cortado, una escala rara, colores que asustan o fechas recortadas.</a:t>
             </a:r>
           </a:p>
         </p:txBody>
@@ -3634,7 +3633,7 @@
     <p:bg>
       <p:bgPr>
         <a:solidFill>
-          <a:srgbClr val="FBF7EF"/>
+          <a:srgbClr val="1F2A44"/>
         </a:solidFill>
         <a:effectLst/>
       </p:bgPr>
@@ -3654,8 +3653,8 @@
         </p:nvSpPr>
         <p:spPr>
           <a:xfrm>
-            <a:off x="640000" y="380000"/>
-            <a:ext cx="10912000" cy="420000"/>
+            <a:off x="640000" y="2300000"/>
+            <a:ext cx="10912000" cy="500000"/>
           </a:xfrm>
           <a:prstGeom prst="rect">
             <a:avLst/>
@@ -3670,17 +3669,17 @@
           <a:p>
             <a:pPr>
               <a:spcAft>
-                <a:spcPts val="630"/>
-              </a:spcAft>
-            </a:pPr>
-            <a:r>
-              <a:rPr sz="1400" b="1">
-                <a:solidFill>
-                  <a:srgbClr val="E8793A"/>
-                </a:solidFill>
-                <a:latin typeface="Nunito Sans"/>
-              </a:rPr>
-              <a:t>BLOQUE 2 · MITOS Y PRESIÓN DEL GRUPO</a:t>
+                <a:spcPts val="810"/>
+              </a:spcAft>
+            </a:pPr>
+            <a:r>
+              <a:rPr sz="1800" b="1">
+                <a:solidFill>
+                  <a:srgbClr val="F4B183"/>
+                </a:solidFill>
+                <a:latin typeface="Nunito Sans"/>
+              </a:rPr>
+              <a:t>BLOQUE 2</a:t>
             </a:r>
           </a:p>
         </p:txBody>
@@ -3693,7 +3692,7 @@
         </p:nvSpPr>
         <p:spPr>
           <a:xfrm>
-            <a:off x="640000" y="760000"/>
+            <a:off x="640000" y="2800000"/>
             <a:ext cx="10912000" cy="800000"/>
           </a:xfrm>
           <a:prstGeom prst="rect">
@@ -3709,313 +3708,21 @@
           <a:p>
             <a:pPr>
               <a:spcAft>
-                <a:spcPts val="1710"/>
-              </a:spcAft>
-            </a:pPr>
-            <a:r>
-              <a:rPr sz="3800" b="1">
-                <a:solidFill>
-                  <a:srgbClr val="1F2A44"/>
+                <a:spcPts val="2160"/>
+              </a:spcAft>
+            </a:pPr>
+            <a:r>
+              <a:rPr sz="4800" b="1">
+                <a:solidFill>
+                  <a:srgbClr val="FBF7EF"/>
                 </a:solidFill>
                 <a:latin typeface="Fredoka"/>
               </a:rPr>
-              <a:t>Mitos frecuentes y lo que dicen las fuentes sanitarias</a:t>
-            </a:r>
-          </a:p>
-        </p:txBody>
-      </p:sp>
-      <p:graphicFrame>
-        <p:nvGraphicFramePr>
-          <p:cNvPr id="4" name="Table 3"/>
-          <p:cNvGraphicFramePr>
-            <a:graphicFrameLocks noGrp="1"/>
-          </p:cNvGraphicFramePr>
-          <p:nvPr/>
-        </p:nvGraphicFramePr>
-        <p:xfrm>
-          <a:off x="640000" y="1700000"/>
-          <a:ext cx="10912000" cy="3000000"/>
-        </p:xfrm>
-        <a:graphic>
-          <a:graphicData uri="http://schemas.openxmlformats.org/drawingml/2006/table">
-            <a:tbl>
-              <a:tblPr firstRow="1" bandRow="1">
-                <a:tableStyleId>{5C22544A-7EE6-4342-B048-85BDC9FD1C3A}</a:tableStyleId>
-              </a:tblPr>
-              <a:tblGrid>
-                <a:gridCol w="5456000"/>
-                <a:gridCol w="5456000"/>
-              </a:tblGrid>
-              <a:tr h="600000">
-                <a:tc>
-                  <a:txBody>
-                    <a:bodyPr/>
-                    <a:lstStyle/>
-                    <a:p>
-                      <a:r>
-                        <a:rPr sz="2000" b="1">
-                          <a:solidFill>
-                            <a:srgbClr val="FBF7EF"/>
-                          </a:solidFill>
-                          <a:latin typeface="Fredoka"/>
-                        </a:rPr>
-                        <a:t>Mito</a:t>
-                      </a:r>
-                    </a:p>
-                  </a:txBody>
-                  <a:tcPr>
-                    <a:solidFill>
-                      <a:srgbClr val="1F2A44"/>
-                    </a:solidFill>
-                  </a:tcPr>
-                </a:tc>
-                <a:tc>
-                  <a:txBody>
-                    <a:bodyPr/>
-                    <a:lstStyle/>
-                    <a:p>
-                      <a:r>
-                        <a:rPr sz="2000" b="1">
-                          <a:solidFill>
-                            <a:srgbClr val="FBF7EF"/>
-                          </a:solidFill>
-                          <a:latin typeface="Fredoka"/>
-                        </a:rPr>
-                        <a:t>Lo que dicen Sanidad y la OMS</a:t>
-                      </a:r>
-                    </a:p>
-                  </a:txBody>
-                  <a:tcPr>
-                    <a:solidFill>
-                      <a:srgbClr val="1F2A44"/>
-                    </a:solidFill>
-                  </a:tcPr>
-                </a:tc>
-              </a:tr>
-              <a:tr h="600000">
-                <a:tc>
-                  <a:txBody>
-                    <a:bodyPr/>
-                    <a:lstStyle/>
-                    <a:p>
-                      <a:r>
-                        <a:rPr sz="2000" b="0">
-                          <a:solidFill>
-                            <a:srgbClr val="1F2A44"/>
-                          </a:solidFill>
-                          <a:latin typeface="Nunito Sans"/>
-                        </a:rPr>
-                        <a:t>«Vapear es solo vapor de agua»</a:t>
-                      </a:r>
-                    </a:p>
-                  </a:txBody>
-                  <a:tcPr>
-                    <a:solidFill>
-                      <a:srgbClr val="FFFFFF"/>
-                    </a:solidFill>
-                  </a:tcPr>
-                </a:tc>
-                <a:tc>
-                  <a:txBody>
-                    <a:bodyPr/>
-                    <a:lstStyle/>
-                    <a:p>
-                      <a:r>
-                        <a:rPr sz="2000" b="0">
-                          <a:solidFill>
-                            <a:srgbClr val="1F2A44"/>
-                          </a:solidFill>
-                          <a:latin typeface="Nunito Sans"/>
-                        </a:rPr>
-                        <a:t>Es un aerosol con sustancias químicas; la mayoría lleva </a:t>
-                      </a:r>
-                      <a:r>
-                        <a:rPr sz="2000" b="1">
-                          <a:solidFill>
-                            <a:srgbClr val="1F2A44"/>
-                          </a:solidFill>
-                          <a:latin typeface="Nunito Sans"/>
-                        </a:rPr>
-                        <a:t>nicotina</a:t>
-                      </a:r>
-                      <a:r>
-                        <a:rPr sz="2000" b="0">
-                          <a:solidFill>
-                            <a:srgbClr val="1F2A44"/>
-                          </a:solidFill>
-                          <a:latin typeface="Nunito Sans"/>
-                        </a:rPr>
-                        <a:t>, que engancha</a:t>
-                      </a:r>
-                    </a:p>
-                  </a:txBody>
-                  <a:tcPr>
-                    <a:solidFill>
-                      <a:srgbClr val="FFFFFF"/>
-                    </a:solidFill>
-                  </a:tcPr>
-                </a:tc>
-              </a:tr>
-              <a:tr h="600000">
-                <a:tc>
-                  <a:txBody>
-                    <a:bodyPr/>
-                    <a:lstStyle/>
-                    <a:p>
-                      <a:r>
-                        <a:rPr sz="2000" b="0">
-                          <a:solidFill>
-                            <a:srgbClr val="1F2A44"/>
-                          </a:solidFill>
-                          <a:latin typeface="Nunito Sans"/>
-                        </a:rPr>
-                        <a:t>«Es natural, así que no hace daño» (cannabis)</a:t>
-                      </a:r>
-                    </a:p>
-                  </a:txBody>
-                  <a:tcPr>
-                    <a:solidFill>
-                      <a:srgbClr val="EAF0F7"/>
-                    </a:solidFill>
-                  </a:tcPr>
-                </a:tc>
-                <a:tc>
-                  <a:txBody>
-                    <a:bodyPr/>
-                    <a:lstStyle/>
-                    <a:p>
-                      <a:r>
-                        <a:rPr sz="2000" b="0">
-                          <a:solidFill>
-                            <a:srgbClr val="1F2A44"/>
-                          </a:solidFill>
-                          <a:latin typeface="Nunito Sans"/>
-                        </a:rPr>
-                        <a:t>Natural no es seguro. En adolescentes puede afectar a memoria y atención</a:t>
-                      </a:r>
-                    </a:p>
-                  </a:txBody>
-                  <a:tcPr>
-                    <a:solidFill>
-                      <a:srgbClr val="EAF0F7"/>
-                    </a:solidFill>
-                  </a:tcPr>
-                </a:tc>
-              </a:tr>
-              <a:tr h="600000">
-                <a:tc>
-                  <a:txBody>
-                    <a:bodyPr/>
-                    <a:lstStyle/>
-                    <a:p>
-                      <a:r>
-                        <a:rPr sz="2000" b="0">
-                          <a:solidFill>
-                            <a:srgbClr val="1F2A44"/>
-                          </a:solidFill>
-                          <a:latin typeface="Nunito Sans"/>
-                        </a:rPr>
-                        <a:t>«Un poco de alcohol a mi edad no pasa nada»</a:t>
-                      </a:r>
-                    </a:p>
-                  </a:txBody>
-                  <a:tcPr>
-                    <a:solidFill>
-                      <a:srgbClr val="FFFFFF"/>
-                    </a:solidFill>
-                  </a:tcPr>
-                </a:tc>
-                <a:tc>
-                  <a:txBody>
-                    <a:bodyPr/>
-                    <a:lstStyle/>
-                    <a:p>
-                      <a:r>
-                        <a:rPr sz="2000" b="0">
-                          <a:solidFill>
-                            <a:srgbClr val="1F2A44"/>
-                          </a:solidFill>
-                          <a:latin typeface="Nunito Sans"/>
-                        </a:rPr>
-                        <a:t>Para menores, Sanidad recomienda </a:t>
-                      </a:r>
-                      <a:r>
-                        <a:rPr sz="2000" b="1">
-                          <a:solidFill>
-                            <a:srgbClr val="1F2A44"/>
-                          </a:solidFill>
-                          <a:latin typeface="Nunito Sans"/>
-                        </a:rPr>
-                        <a:t>cero</a:t>
-                      </a:r>
-                      <a:r>
-                        <a:rPr sz="2000" b="0">
-                          <a:solidFill>
-                            <a:srgbClr val="1F2A44"/>
-                          </a:solidFill>
-                          <a:latin typeface="Nunito Sans"/>
-                        </a:rPr>
-                        <a:t>: el cerebro aún se está formando</a:t>
-                      </a:r>
-                    </a:p>
-                  </a:txBody>
-                  <a:tcPr>
-                    <a:solidFill>
-                      <a:srgbClr val="FFFFFF"/>
-                    </a:solidFill>
-                  </a:tcPr>
-                </a:tc>
-              </a:tr>
-              <a:tr h="600000">
-                <a:tc>
-                  <a:txBody>
-                    <a:bodyPr/>
-                    <a:lstStyle/>
-                    <a:p>
-                      <a:r>
-                        <a:rPr sz="2000" b="0">
-                          <a:solidFill>
-                            <a:srgbClr val="1F2A44"/>
-                          </a:solidFill>
-                          <a:latin typeface="Nunito Sans"/>
-                        </a:rPr>
-                        <a:t>«Si solo fumo en fiestas, no me engancho»</a:t>
-                      </a:r>
-                    </a:p>
-                  </a:txBody>
-                  <a:tcPr>
-                    <a:solidFill>
-                      <a:srgbClr val="EAF0F7"/>
-                    </a:solidFill>
-                  </a:tcPr>
-                </a:tc>
-                <a:tc>
-                  <a:txBody>
-                    <a:bodyPr/>
-                    <a:lstStyle/>
-                    <a:p>
-                      <a:r>
-                        <a:rPr sz="2000" b="0">
-                          <a:solidFill>
-                            <a:srgbClr val="1F2A44"/>
-                          </a:solidFill>
-                          <a:latin typeface="Nunito Sans"/>
-                        </a:rPr>
-                        <a:t>La nicotina es muy adictiva: puedes engancharte sin fumar cada día</a:t>
-                      </a:r>
-                    </a:p>
-                  </a:txBody>
-                  <a:tcPr>
-                    <a:solidFill>
-                      <a:srgbClr val="EAF0F7"/>
-                    </a:solidFill>
-                  </a:tcPr>
-                </a:tc>
-              </a:tr>
-            </a:tbl>
-          </a:graphicData>
-        </a:graphic>
-      </p:graphicFrame>
+              <a:t>Casos resueltos</a:t>
+            </a:r>
+          </a:p>
+        </p:txBody>
+      </p:sp>
     </p:spTree>
   </p:cSld>
   <p:clrMapOvr>
@@ -4076,7 +3783,7 @@
                 </a:solidFill>
                 <a:latin typeface="Nunito Sans"/>
               </a:rPr>
-              <a:t>BLOQUE 2 · MITOS Y PRESIÓN DEL GRUPO</a:t>
+              <a:t>BLOQUE 2 · CASOS RESUELTOS</a:t>
             </a:r>
           </a:p>
         </p:txBody>
@@ -4115,7 +3822,7 @@
                 </a:solidFill>
                 <a:latin typeface="Fredoka"/>
               </a:rPr>
-              <a:t>Caso 1 · El vídeo del vaper</a:t>
+              <a:t>Caso 1 · El precio del bocadillo</a:t>
             </a:r>
           </a:p>
         </p:txBody>
@@ -4197,7 +3904,7 @@
                 </a:solidFill>
                 <a:latin typeface="Nunito Sans"/>
               </a:rPr>
-              <a:t>El vídeo del principio: «Es solo vapor de agua con sabor a fresa». Lo publica una cuenta que vende vapers. (Ejemplo inventado.)</a:t>
+              <a:t>Un gráfico del bar: el bocadillo pasa de 2,00 € a 2,20 €. La barra nueva parece el triple de alta. (Ejemplo inventado.)</a:t>
             </a:r>
           </a:p>
         </p:txBody>
@@ -4245,7 +3952,7 @@
                 </a:solidFill>
                 <a:latin typeface="Nunito Sans"/>
               </a:rPr>
-              <a:t>¿Quién lo dice? Una cuenta que vende vapers. ¿Qué gana? Vender más (sesión 31).</a:t>
+              <a:t>Miro el eje: empieza en 1,90 €, no en 0.</a:t>
             </a:r>
           </a:p>
           <a:p>
@@ -4270,7 +3977,7 @@
                 </a:solidFill>
                 <a:latin typeface="Nunito Sans"/>
               </a:rPr>
-              <a:t>¿Cómo lo sabe? No da ninguna prueba: solo lo afirma.</a:t>
+              <a:t>Desde 1,90, la barra de 2,00 mide 0,10 y la de 2,20 mide 0,30: el triple.</a:t>
             </a:r>
           </a:p>
           <a:p>
@@ -4295,7 +4002,7 @@
                 </a:solidFill>
                 <a:latin typeface="Nunito Sans"/>
               </a:rPr>
-              <a:t>Contrasto con fuentes sanitarias, como el Ministerio de Sanidad o la OMS: dicen que no es solo vapor.</a:t>
+              <a:t>Pero el precio real ha subido 20 céntimos: un 10 %.</a:t>
             </a:r>
           </a:p>
           <a:p>
@@ -4320,7 +4027,7 @@
                 </a:solidFill>
                 <a:latin typeface="Nunito Sans"/>
               </a:rPr>
-              <a:t>Conclusión: el mito cae con las preguntas de siempre. No hace falta un sermón: hace falta mirar la fuente.</a:t>
+              <a:t>Conclusión: el eje cortado hace que una subida del 10 % parezca el triple.</a:t>
             </a:r>
           </a:p>
         </p:txBody>
@@ -4385,7 +4092,7 @@
                 </a:solidFill>
                 <a:latin typeface="Nunito Sans"/>
               </a:rPr>
-              <a:t>BLOQUE 2 · MITOS Y PRESIÓN DEL GRUPO</a:t>
+              <a:t>BLOQUE 2 · CASOS RESUELTOS</a:t>
             </a:r>
           </a:p>
         </p:txBody>
@@ -4424,7 +4131,7 @@
                 </a:solidFill>
                 <a:latin typeface="Fredoka"/>
               </a:rPr>
-              <a:t>Caso 2 · «Si lo hace todo el mundo»</a:t>
+              <a:t>Caso 2 · El mapa rojo</a:t>
             </a:r>
           </a:p>
         </p:txBody>
@@ -4506,7 +4213,7 @@
                 </a:solidFill>
                 <a:latin typeface="Nunito Sans"/>
               </a:rPr>
-              <a:t>En Aste Nagusia, alguien de la cuadrilla le pasa un vaper a un chico: «Venga, si lo hace todo el mundo». (Ejemplo inventado.)</a:t>
+              <a:t>Un mapa de Bizkaia pinta de rojo intenso los pueblos donde «suben los robos de bicis». (Ejemplo inventado.)</a:t>
             </a:r>
           </a:p>
         </p:txBody>
@@ -4554,7 +4261,7 @@
                 </a:solidFill>
                 <a:latin typeface="Nunito Sans"/>
               </a:rPr>
-              <a:t>Es una apelación a la mayoría (sesión 28): «si todos lo hacen, estará bien».</a:t>
+              <a:t>El rojo intenso da sensación de peligro.</a:t>
             </a:r>
           </a:p>
           <a:p>
@@ -4579,16 +4286,48 @@
                 </a:solidFill>
                 <a:latin typeface="Nunito Sans"/>
               </a:rPr>
-              <a:t>¿Es verdad? Muchos estudios encuentran que creemos que los demás consumen </a:t>
-            </a:r>
+              <a:t>Miro los números: en muchos pueblos se pasa de 1 robo a 2.</a:t>
+            </a:r>
+          </a:p>
+          <a:p>
+            <a:pPr>
+              <a:spcAft>
+                <a:spcPts val="1080"/>
+              </a:spcAft>
+            </a:pPr>
             <a:r>
               <a:rPr sz="2400" b="1">
                 <a:solidFill>
+                  <a:srgbClr val="E8793A"/>
+                </a:solidFill>
+                <a:latin typeface="Nunito Sans"/>
+              </a:rPr>
+              <a:t>3. </a:t>
+            </a:r>
+            <a:r>
+              <a:rPr sz="2400" b="0">
+                <a:solidFill>
                   <a:srgbClr val="1F2A44"/>
                 </a:solidFill>
                 <a:latin typeface="Nunito Sans"/>
               </a:rPr>
-              <a:t>más</a:t>
+              <a:t>La leyenda usa el mismo rojo para cualquier subida, sea de 1 o de 100.</a:t>
+            </a:r>
+          </a:p>
+          <a:p>
+            <a:pPr>
+              <a:spcAft>
+                <a:spcPts val="1080"/>
+              </a:spcAft>
+            </a:pPr>
+            <a:r>
+              <a:rPr sz="2400" b="1">
+                <a:solidFill>
+                  <a:srgbClr val="E8793A"/>
+                </a:solidFill>
+                <a:latin typeface="Nunito Sans"/>
+              </a:rPr>
+              <a:t>4. </a:t>
             </a:r>
             <a:r>
               <a:rPr sz="2400" b="0">
@@ -4597,57 +4336,7 @@
                 </a:solidFill>
                 <a:latin typeface="Nunito Sans"/>
               </a:rPr>
-              <a:t> de lo que consumen.</a:t>
-            </a:r>
-          </a:p>
-          <a:p>
-            <a:pPr>
-              <a:spcAft>
-                <a:spcPts val="1080"/>
-              </a:spcAft>
-            </a:pPr>
-            <a:r>
-              <a:rPr sz="2400" b="1">
-                <a:solidFill>
-                  <a:srgbClr val="E8793A"/>
-                </a:solidFill>
-                <a:latin typeface="Nunito Sans"/>
-              </a:rPr>
-              <a:t>3. </a:t>
-            </a:r>
-            <a:r>
-              <a:rPr sz="2400" b="0">
-                <a:solidFill>
-                  <a:srgbClr val="1F2A44"/>
-                </a:solidFill>
-                <a:latin typeface="Nunito Sans"/>
-              </a:rPr>
-              <a:t>Y aunque fuera verdad, que muchos lo hagan no dice si es bueno para mí.</a:t>
-            </a:r>
-          </a:p>
-          <a:p>
-            <a:pPr>
-              <a:spcAft>
-                <a:spcPts val="1080"/>
-              </a:spcAft>
-            </a:pPr>
-            <a:r>
-              <a:rPr sz="2400" b="1">
-                <a:solidFill>
-                  <a:srgbClr val="E8793A"/>
-                </a:solidFill>
-                <a:latin typeface="Nunito Sans"/>
-              </a:rPr>
-              <a:t>4. </a:t>
-            </a:r>
-            <a:r>
-              <a:rPr sz="2400" b="0">
-                <a:solidFill>
-                  <a:srgbClr val="1F2A44"/>
-                </a:solidFill>
-                <a:latin typeface="Nunito Sans"/>
-              </a:rPr>
-              <a:t>Conclusión: «todo el mundo» no es una razón. Y, como en Asch, un solo aliado ayuda a resistir.</a:t>
+              <a:t>Conclusión: el color transmite una emoción que los datos no justifican. Leo la leyenda y las cifras.</a:t>
             </a:r>
           </a:p>
         </p:txBody>
@@ -4666,7 +4355,7 @@
     <p:bg>
       <p:bgPr>
         <a:solidFill>
-          <a:srgbClr val="1F2A44"/>
+          <a:srgbClr val="FBF7EF"/>
         </a:solidFill>
         <a:effectLst/>
       </p:bgPr>
@@ -4686,8 +4375,8 @@
         </p:nvSpPr>
         <p:spPr>
           <a:xfrm>
-            <a:off x="640000" y="2300000"/>
-            <a:ext cx="10912000" cy="500000"/>
+            <a:off x="640000" y="380000"/>
+            <a:ext cx="10912000" cy="420000"/>
           </a:xfrm>
           <a:prstGeom prst="rect">
             <a:avLst/>
@@ -4702,17 +4391,17 @@
           <a:p>
             <a:pPr>
               <a:spcAft>
-                <a:spcPts val="810"/>
-              </a:spcAft>
-            </a:pPr>
-            <a:r>
-              <a:rPr sz="1800" b="1">
-                <a:solidFill>
-                  <a:srgbClr val="F4B183"/>
-                </a:solidFill>
-                <a:latin typeface="Nunito Sans"/>
-              </a:rPr>
-              <a:t>BLOQUE 3</a:t>
+                <a:spcPts val="630"/>
+              </a:spcAft>
+            </a:pPr>
+            <a:r>
+              <a:rPr sz="1400" b="1">
+                <a:solidFill>
+                  <a:srgbClr val="E8793A"/>
+                </a:solidFill>
+                <a:latin typeface="Nunito Sans"/>
+              </a:rPr>
+              <a:t>BLOQUE 2 · CASOS RESUELTOS</a:t>
             </a:r>
           </a:p>
         </p:txBody>
@@ -4725,7 +4414,7 @@
         </p:nvSpPr>
         <p:spPr>
           <a:xfrm>
-            <a:off x="640000" y="2800000"/>
+            <a:off x="640000" y="760000"/>
             <a:ext cx="10912000" cy="800000"/>
           </a:xfrm>
           <a:prstGeom prst="rect">
@@ -4741,17 +4430,222 @@
           <a:p>
             <a:pPr>
               <a:spcAft>
-                <a:spcPts val="2160"/>
-              </a:spcAft>
-            </a:pPr>
-            <a:r>
-              <a:rPr sz="4800" b="1">
-                <a:solidFill>
-                  <a:srgbClr val="FBF7EF"/>
+                <a:spcPts val="1710"/>
+              </a:spcAft>
+            </a:pPr>
+            <a:r>
+              <a:rPr sz="3800" b="1">
+                <a:solidFill>
+                  <a:srgbClr val="1F2A44"/>
                 </a:solidFill>
                 <a:latin typeface="Fredoka"/>
               </a:rPr>
-              <a:t>Mucho tiempo no es adicción</a:t>
+              <a:t>Caso 3 · Solo los meses buenos</a:t>
+            </a:r>
+          </a:p>
+        </p:txBody>
+      </p:sp>
+      <p:sp>
+        <p:nvSpPr>
+          <p:cNvPr id="4" name="Rectangle 3"/>
+          <p:cNvSpPr/>
+          <p:nvPr/>
+        </p:nvSpPr>
+        <p:spPr>
+          <a:xfrm>
+            <a:off x="640000" y="1600000"/>
+            <a:ext cx="10912000" cy="1100000"/>
+          </a:xfrm>
+          <a:prstGeom prst="rect">
+            <a:avLst/>
+          </a:prstGeom>
+          <a:solidFill>
+            <a:srgbClr val="FFFFFF"/>
+          </a:solidFill>
+          <a:ln>
+            <a:noFill/>
+          </a:ln>
+        </p:spPr>
+        <p:style>
+          <a:lnRef idx="1">
+            <a:schemeClr val="accent1"/>
+          </a:lnRef>
+          <a:fillRef idx="3">
+            <a:schemeClr val="accent1"/>
+          </a:fillRef>
+          <a:effectRef idx="2">
+            <a:schemeClr val="accent1"/>
+          </a:effectRef>
+          <a:fontRef idx="minor">
+            <a:schemeClr val="lt1"/>
+          </a:fontRef>
+        </p:style>
+        <p:txBody>
+          <a:bodyPr rtlCol="0" anchor="ctr"/>
+          <a:lstStyle/>
+          <a:p>
+            <a:pPr algn="ctr"/>
+          </a:p>
+        </p:txBody>
+      </p:sp>
+      <p:sp>
+        <p:nvSpPr>
+          <p:cNvPr id="5" name="TextBox 4"/>
+          <p:cNvSpPr txBox="1"/>
+          <p:nvPr/>
+        </p:nvSpPr>
+        <p:spPr>
+          <a:xfrm>
+            <a:off x="840000" y="1650000"/>
+            <a:ext cx="10512000" cy="1000000"/>
+          </a:xfrm>
+          <a:prstGeom prst="rect">
+            <a:avLst/>
+          </a:prstGeom>
+          <a:noFill/>
+        </p:spPr>
+        <p:txBody>
+          <a:bodyPr wrap="square" anchor="ctr">
+            <a:spAutoFit/>
+          </a:bodyPr>
+          <a:lstStyle/>
+          <a:p>
+            <a:pPr>
+              <a:spcAft>
+                <a:spcPts val="1170"/>
+              </a:spcAft>
+            </a:pPr>
+            <a:r>
+              <a:rPr sz="2600" b="1">
+                <a:solidFill>
+                  <a:srgbClr val="1F2A44"/>
+                </a:solidFill>
+                <a:latin typeface="Nunito Sans"/>
+              </a:rPr>
+              <a:t>Un youtuber enseña un gráfico: sus seguidores suben de marzo a junio. «¡Crezco sin parar!» (Ejemplo inventado.)</a:t>
+            </a:r>
+          </a:p>
+        </p:txBody>
+      </p:sp>
+      <p:sp>
+        <p:nvSpPr>
+          <p:cNvPr id="6" name="TextBox 5"/>
+          <p:cNvSpPr txBox="1"/>
+          <p:nvPr/>
+        </p:nvSpPr>
+        <p:spPr>
+          <a:xfrm>
+            <a:off x="640000" y="2900000"/>
+            <a:ext cx="10912000" cy="3500000"/>
+          </a:xfrm>
+          <a:prstGeom prst="rect">
+            <a:avLst/>
+          </a:prstGeom>
+          <a:noFill/>
+        </p:spPr>
+        <p:txBody>
+          <a:bodyPr wrap="square">
+            <a:spAutoFit/>
+          </a:bodyPr>
+          <a:lstStyle/>
+          <a:p>
+            <a:pPr>
+              <a:spcAft>
+                <a:spcPts val="1080"/>
+              </a:spcAft>
+            </a:pPr>
+            <a:r>
+              <a:rPr sz="2400" b="1">
+                <a:solidFill>
+                  <a:srgbClr val="E8793A"/>
+                </a:solidFill>
+                <a:latin typeface="Nunito Sans"/>
+              </a:rPr>
+              <a:t>1. </a:t>
+            </a:r>
+            <a:r>
+              <a:rPr sz="2400" b="0">
+                <a:solidFill>
+                  <a:srgbClr val="1F2A44"/>
+                </a:solidFill>
+                <a:latin typeface="Nunito Sans"/>
+              </a:rPr>
+              <a:t>¿Qué fechas enseña? Solo de marzo a junio.</a:t>
+            </a:r>
+          </a:p>
+          <a:p>
+            <a:pPr>
+              <a:spcAft>
+                <a:spcPts val="1080"/>
+              </a:spcAft>
+            </a:pPr>
+            <a:r>
+              <a:rPr sz="2400" b="1">
+                <a:solidFill>
+                  <a:srgbClr val="E8793A"/>
+                </a:solidFill>
+                <a:latin typeface="Nunito Sans"/>
+              </a:rPr>
+              <a:t>2. </a:t>
+            </a:r>
+            <a:r>
+              <a:rPr sz="2400" b="0">
+                <a:solidFill>
+                  <a:srgbClr val="1F2A44"/>
+                </a:solidFill>
+                <a:latin typeface="Nunito Sans"/>
+              </a:rPr>
+              <a:t>¿Y el resto del año? En enero tenía más seguidores que en junio.</a:t>
+            </a:r>
+          </a:p>
+          <a:p>
+            <a:pPr>
+              <a:spcAft>
+                <a:spcPts val="1080"/>
+              </a:spcAft>
+            </a:pPr>
+            <a:r>
+              <a:rPr sz="2400" b="1">
+                <a:solidFill>
+                  <a:srgbClr val="E8793A"/>
+                </a:solidFill>
+                <a:latin typeface="Nunito Sans"/>
+              </a:rPr>
+              <a:t>3. </a:t>
+            </a:r>
+            <a:r>
+              <a:rPr sz="2400" b="0">
+                <a:solidFill>
+                  <a:srgbClr val="1F2A44"/>
+                </a:solidFill>
+                <a:latin typeface="Nunito Sans"/>
+              </a:rPr>
+              <a:t>Ha recortado el gráfico para enseñar solo la parte que sube.</a:t>
+            </a:r>
+          </a:p>
+          <a:p>
+            <a:pPr>
+              <a:spcAft>
+                <a:spcPts val="1080"/>
+              </a:spcAft>
+            </a:pPr>
+            <a:r>
+              <a:rPr sz="2400" b="1">
+                <a:solidFill>
+                  <a:srgbClr val="E8793A"/>
+                </a:solidFill>
+                <a:latin typeface="Nunito Sans"/>
+              </a:rPr>
+              <a:t>4. </a:t>
+            </a:r>
+            <a:r>
+              <a:rPr sz="2400" b="0">
+                <a:solidFill>
+                  <a:srgbClr val="1F2A44"/>
+                </a:solidFill>
+                <a:latin typeface="Nunito Sans"/>
+              </a:rPr>
+              <a:t>Conclusión: un gráfico también engaña por lo que deja fuera. Pregunto qué fechas faltan.</a:t>
             </a:r>
           </a:p>
         </p:txBody>
@@ -4816,7 +4710,7 @@
                 </a:solidFill>
                 <a:latin typeface="Nunito Sans"/>
               </a:rPr>
-              <a:t>CASO TRAMPA · BLOQUE 3 · MUCHO TIEMPO NO ES ADICCIÓN</a:t>
+              <a:t>CASO TRAMPA · BLOQUE 2 · CASOS RESUELTOS</a:t>
             </a:r>
           </a:p>
         </p:txBody>
@@ -4855,7 +4749,7 @@
                 </a:solidFill>
                 <a:latin typeface="Fredoka"/>
               </a:rPr>
-              <a:t>⚠ ¿Adicto al Fortnite?</a:t>
+              <a:t>⚠ Las temperaturas</a:t>
             </a:r>
           </a:p>
         </p:txBody>
@@ -4937,7 +4831,7 @@
                 </a:solidFill>
                 <a:latin typeface="Nunito Sans"/>
               </a:rPr>
-              <a:t>Un chico juega tres horas al Fortnite los sábados con sus primos. Duerme bien, estudia y queda con la cuadrilla. Su tía dice: «Es adicto». (Ejemplo inventado.)</a:t>
+              <a:t>Un gráfico de líneas muestra la temperatura media de agosto en Bilbao durante 30 años. El eje va de 18 °C a 22 °C. (Ejemplo inventado.)</a:t>
             </a:r>
           </a:p>
         </p:txBody>
@@ -4985,7 +4879,7 @@
                 </a:solidFill>
                 <a:latin typeface="Nunito Sans"/>
               </a:rPr>
-              <a:t>Tres horas es mucho. ¿Tiene razón la tía?</a:t>
+              <a:t>El eje no empieza en 0. ¿Es un gráfico engañoso?</a:t>
             </a:r>
           </a:p>
           <a:p>
@@ -5010,7 +4904,7 @@
                 </a:solidFill>
                 <a:latin typeface="Nunito Sans"/>
               </a:rPr>
-              <a:t>Parece que sí: tres horas seguidas es bastante tiempo.</a:t>
+              <a:t>En las barras, el largo es la cantidad: por eso su eje debe empezar en 0.</a:t>
             </a:r>
           </a:p>
           <a:p>
@@ -5035,16 +4929,48 @@
                 </a:solidFill>
                 <a:latin typeface="Nunito Sans"/>
               </a:rPr>
-              <a:t>Pero la adicción no se mide solo en horas. Se mira si hay </a:t>
-            </a:r>
+              <a:t>Aquí hay una línea, y 0 °C no es «nada de calor»: es cuando se hiela el agua.</a:t>
+            </a:r>
+          </a:p>
+          <a:p>
+            <a:pPr>
+              <a:spcAft>
+                <a:spcPts val="1080"/>
+              </a:spcAft>
+            </a:pPr>
             <a:r>
               <a:rPr sz="2400" b="1">
                 <a:solidFill>
+                  <a:srgbClr val="E8793A"/>
+                </a:solidFill>
+                <a:latin typeface="Nunito Sans"/>
+              </a:rPr>
+              <a:t>4. </a:t>
+            </a:r>
+            <a:r>
+              <a:rPr sz="2400" b="0">
+                <a:solidFill>
                   <a:srgbClr val="1F2A44"/>
                 </a:solidFill>
                 <a:latin typeface="Nunito Sans"/>
               </a:rPr>
-              <a:t>pérdida de control</a:t>
+              <a:t>Con el eje de 0 a 22, una subida de 1 o 2 grados, que importa mucho, casi no se vería.</a:t>
+            </a:r>
+          </a:p>
+          <a:p>
+            <a:pPr>
+              <a:spcAft>
+                <a:spcPts val="1080"/>
+              </a:spcAft>
+            </a:pPr>
+            <a:r>
+              <a:rPr sz="2400" b="1">
+                <a:solidFill>
+                  <a:srgbClr val="E8793A"/>
+                </a:solidFill>
+                <a:latin typeface="Nunito Sans"/>
+              </a:rPr>
+              <a:t>5. </a:t>
             </a:r>
             <a:r>
               <a:rPr sz="2400" b="0">
@@ -5053,57 +4979,7 @@
                 </a:solidFill>
                 <a:latin typeface="Nunito Sans"/>
               </a:rPr>
-              <a:t> y daño.</a:t>
-            </a:r>
-          </a:p>
-          <a:p>
-            <a:pPr>
-              <a:spcAft>
-                <a:spcPts val="1080"/>
-              </a:spcAft>
-            </a:pPr>
-            <a:r>
-              <a:rPr sz="2400" b="1">
-                <a:solidFill>
-                  <a:srgbClr val="E8793A"/>
-                </a:solidFill>
-                <a:latin typeface="Nunito Sans"/>
-              </a:rPr>
-              <a:t>4. </a:t>
-            </a:r>
-            <a:r>
-              <a:rPr sz="2400" b="0">
-                <a:solidFill>
-                  <a:srgbClr val="1F2A44"/>
-                </a:solidFill>
-                <a:latin typeface="Nunito Sans"/>
-              </a:rPr>
-              <a:t>Ese chico elige cuándo jugar y no deja de lado el sueño, los estudios ni a la cuadrilla.</a:t>
-            </a:r>
-          </a:p>
-          <a:p>
-            <a:pPr>
-              <a:spcAft>
-                <a:spcPts val="1080"/>
-              </a:spcAft>
-            </a:pPr>
-            <a:r>
-              <a:rPr sz="2400" b="1">
-                <a:solidFill>
-                  <a:srgbClr val="E8793A"/>
-                </a:solidFill>
-                <a:latin typeface="Nunito Sans"/>
-              </a:rPr>
-              <a:t>5. </a:t>
-            </a:r>
-            <a:r>
-              <a:rPr sz="2400" b="0">
-                <a:solidFill>
-                  <a:srgbClr val="1F2A44"/>
-                </a:solidFill>
-                <a:latin typeface="Nunito Sans"/>
-              </a:rPr>
-              <a:t>Conclusión: mucho tiempo no es lo mismo que adicción. Antes de poner la etiqueta, mira las señales.</a:t>
+              <a:t>Conclusión: un eje que no empieza en 0 no siempre engaña. Pregunto si la diferencia que enseña importa.</a:t>
             </a:r>
           </a:p>
         </p:txBody>
@@ -5168,7 +5044,7 @@
                 </a:solidFill>
                 <a:latin typeface="Nunito Sans"/>
               </a:rPr>
-              <a:t>BLOQUE 3 · MUCHO TIEMPO NO ES ADICCIÓN</a:t>
+              <a:t>LO DE HOY EN TRES LÍNEAS</a:t>
             </a:r>
           </a:p>
         </p:txBody>
@@ -5207,7 +5083,7 @@
                 </a:solidFill>
                 <a:latin typeface="Fredoka"/>
               </a:rPr>
-              <a:t>Ocio saludable</a:t>
+              <a:t>Escríbelo tú primero, sin mirar</a:t>
             </a:r>
           </a:p>
         </p:txBody>
@@ -5220,8 +5096,8 @@
         </p:nvSpPr>
         <p:spPr>
           <a:xfrm>
-            <a:off x="840000" y="1730000"/>
-            <a:ext cx="10512000" cy="1000000"/>
+            <a:off x="640000" y="1800000"/>
+            <a:ext cx="10912000" cy="1500000"/>
           </a:xfrm>
           <a:prstGeom prst="rect">
             <a:avLst/>
@@ -5229,45 +5105,6 @@
           <a:noFill/>
         </p:spPr>
         <p:txBody>
-          <a:bodyPr wrap="square" anchor="ctr">
-            <a:spAutoFit/>
-          </a:bodyPr>
-          <a:lstStyle/>
-          <a:p>
-            <a:pPr>
-              <a:spcAft>
-                <a:spcPts val="1080"/>
-              </a:spcAft>
-            </a:pPr>
-            <a:r>
-              <a:rPr sz="2400" b="0">
-                <a:solidFill>
-                  <a:srgbClr val="1F2A44"/>
-                </a:solidFill>
-                <a:latin typeface="Nunito Sans"/>
-              </a:rPr>
-              <a:t>Una forma de verlo: el ocio saludable es el que…</a:t>
-            </a:r>
-          </a:p>
-        </p:txBody>
-      </p:sp>
-      <p:sp>
-        <p:nvSpPr>
-          <p:cNvPr id="5" name="TextBox 4"/>
-          <p:cNvSpPr txBox="1"/>
-          <p:nvPr/>
-        </p:nvSpPr>
-        <p:spPr>
-          <a:xfrm>
-            <a:off x="640000" y="3000000"/>
-            <a:ext cx="10912000" cy="3458000"/>
-          </a:xfrm>
-          <a:prstGeom prst="rect">
-            <a:avLst/>
-          </a:prstGeom>
-          <a:noFill/>
-        </p:spPr>
-        <p:txBody>
           <a:bodyPr wrap="square">
             <a:spAutoFit/>
           </a:bodyPr>
@@ -5275,128 +5112,17 @@
           <a:p>
             <a:pPr>
               <a:spcAft>
-                <a:spcPts val="1260"/>
-              </a:spcAft>
-            </a:pPr>
-            <a:r>
-              <a:rPr sz="2800" b="1">
-                <a:solidFill>
-                  <a:srgbClr val="E8793A"/>
-                </a:solidFill>
-                <a:latin typeface="Nunito Sans"/>
-              </a:rPr>
-              <a:t>• </a:t>
-            </a:r>
-            <a:r>
-              <a:rPr sz="2800" b="0">
-                <a:solidFill>
-                  <a:srgbClr val="1F2A44"/>
-                </a:solidFill>
-                <a:latin typeface="Nunito Sans"/>
-              </a:rPr>
-              <a:t>Eliges tú, no el grupo ni la app (sesión 52)</a:t>
-            </a:r>
-          </a:p>
-          <a:p>
-            <a:pPr>
-              <a:spcAft>
-                <a:spcPts val="1260"/>
-              </a:spcAft>
-            </a:pPr>
-            <a:r>
-              <a:rPr sz="2800" b="1">
-                <a:solidFill>
-                  <a:srgbClr val="E8793A"/>
-                </a:solidFill>
-                <a:latin typeface="Nunito Sans"/>
-              </a:rPr>
-              <a:t>• </a:t>
-            </a:r>
-            <a:r>
-              <a:rPr sz="2800" b="0">
-                <a:solidFill>
-                  <a:srgbClr val="1F2A44"/>
-                </a:solidFill>
-                <a:latin typeface="Nunito Sans"/>
-              </a:rPr>
-              <a:t>Es </a:t>
-            </a:r>
-            <a:r>
-              <a:rPr sz="2800" b="1">
-                <a:solidFill>
-                  <a:srgbClr val="1F2A44"/>
-                </a:solidFill>
-                <a:latin typeface="Nunito Sans"/>
-              </a:rPr>
-              <a:t>variado</a:t>
-            </a:r>
-            <a:r>
-              <a:rPr sz="2800" b="0">
-                <a:solidFill>
-                  <a:srgbClr val="1F2A44"/>
-                </a:solidFill>
-                <a:latin typeface="Nunito Sans"/>
-              </a:rPr>
-              <a:t>: deporte, música, monte, leer, quedar con la cuadrilla</a:t>
-            </a:r>
-          </a:p>
-          <a:p>
-            <a:pPr>
-              <a:spcAft>
-                <a:spcPts val="1260"/>
-              </a:spcAft>
-            </a:pPr>
-            <a:r>
-              <a:rPr sz="2800" b="1">
-                <a:solidFill>
-                  <a:srgbClr val="E8793A"/>
-                </a:solidFill>
-                <a:latin typeface="Nunito Sans"/>
-              </a:rPr>
-              <a:t>• </a:t>
-            </a:r>
-            <a:r>
-              <a:rPr sz="2800" b="0">
-                <a:solidFill>
-                  <a:srgbClr val="1F2A44"/>
-                </a:solidFill>
-                <a:latin typeface="Nunito Sans"/>
-              </a:rPr>
-              <a:t>No te quita el sueño, los estudios ni la salud</a:t>
-            </a:r>
-          </a:p>
-          <a:p>
-            <a:pPr>
-              <a:spcAft>
-                <a:spcPts val="1260"/>
-              </a:spcAft>
-            </a:pPr>
-            <a:r>
-              <a:rPr sz="2800" b="1">
-                <a:solidFill>
-                  <a:srgbClr val="E8793A"/>
-                </a:solidFill>
-                <a:latin typeface="Nunito Sans"/>
-              </a:rPr>
-              <a:t>• </a:t>
-            </a:r>
-            <a:r>
-              <a:rPr sz="2800" b="0">
-                <a:solidFill>
-                  <a:srgbClr val="1F2A44"/>
-                </a:solidFill>
-                <a:latin typeface="Nunito Sans"/>
-              </a:rPr>
-              <a:t>Puedes dejarlo cuando quieres: sigues teniendo el </a:t>
-            </a:r>
-            <a:r>
-              <a:rPr sz="2800" b="1">
-                <a:solidFill>
-                  <a:srgbClr val="1F2A44"/>
-                </a:solidFill>
-                <a:latin typeface="Nunito Sans"/>
-              </a:rPr>
-              <a:t>control</a:t>
+                <a:spcPts val="1170"/>
+              </a:spcAft>
+            </a:pPr>
+            <a:r>
+              <a:rPr sz="2600" b="0">
+                <a:solidFill>
+                  <a:srgbClr val="4A5568"/>
+                </a:solidFill>
+                <a:latin typeface="Nunito Sans"/>
+              </a:rPr>
+              <a:t>Dos minutos. Después lo comparamos.</a:t>
             </a:r>
           </a:p>
         </p:txBody>
@@ -5474,8 +5200,8 @@
         </p:nvSpPr>
         <p:spPr>
           <a:xfrm>
-            <a:off x="640000" y="760000"/>
-            <a:ext cx="10912000" cy="800000"/>
+            <a:off x="640000" y="1300000"/>
+            <a:ext cx="10912000" cy="4800000"/>
           </a:xfrm>
           <a:prstGeom prst="rect">
             <a:avLst/>
@@ -5490,56 +5216,76 @@
           <a:p>
             <a:pPr>
               <a:spcAft>
-                <a:spcPts val="1710"/>
-              </a:spcAft>
-            </a:pPr>
-            <a:r>
-              <a:rPr sz="3800" b="1">
+                <a:spcPts val="1350"/>
+              </a:spcAft>
+            </a:pPr>
+            <a:r>
+              <a:rPr sz="3000" b="1">
+                <a:solidFill>
+                  <a:srgbClr val="E8793A"/>
+                </a:solidFill>
+                <a:latin typeface="Nunito Sans"/>
+              </a:rPr>
+              <a:t>1. </a:t>
+            </a:r>
+            <a:r>
+              <a:rPr sz="3000" b="0">
                 <a:solidFill>
                   <a:srgbClr val="1F2A44"/>
                 </a:solidFill>
-                <a:latin typeface="Fredoka"/>
-              </a:rPr>
-              <a:t>Escríbelo tú primero, sin mirar</a:t>
-            </a:r>
-          </a:p>
-        </p:txBody>
-      </p:sp>
-      <p:sp>
-        <p:nvSpPr>
-          <p:cNvPr id="4" name="TextBox 3"/>
-          <p:cNvSpPr txBox="1"/>
-          <p:nvPr/>
-        </p:nvSpPr>
-        <p:spPr>
-          <a:xfrm>
-            <a:off x="640000" y="1800000"/>
-            <a:ext cx="10912000" cy="1500000"/>
-          </a:xfrm>
-          <a:prstGeom prst="rect">
-            <a:avLst/>
-          </a:prstGeom>
-          <a:noFill/>
-        </p:spPr>
-        <p:txBody>
-          <a:bodyPr wrap="square">
-            <a:spAutoFit/>
-          </a:bodyPr>
-          <a:lstStyle/>
-          <a:p>
-            <a:pPr>
-              <a:spcAft>
-                <a:spcPts val="1170"/>
-              </a:spcAft>
-            </a:pPr>
-            <a:r>
-              <a:rPr sz="2600" b="0">
-                <a:solidFill>
-                  <a:srgbClr val="4A5568"/>
-                </a:solidFill>
-                <a:latin typeface="Nunito Sans"/>
-              </a:rPr>
-              <a:t>Dos minutos. Después lo comparamos.</a:t>
+                <a:latin typeface="Nunito Sans"/>
+              </a:rPr>
+              <a:t>Un gráfico puede engañar aunque los números sean verdad.</a:t>
+            </a:r>
+          </a:p>
+          <a:p>
+            <a:pPr>
+              <a:spcAft>
+                <a:spcPts val="1350"/>
+              </a:spcAft>
+            </a:pPr>
+            <a:r>
+              <a:rPr sz="3000" b="1">
+                <a:solidFill>
+                  <a:srgbClr val="E8793A"/>
+                </a:solidFill>
+                <a:latin typeface="Nunito Sans"/>
+              </a:rPr>
+              <a:t>2. </a:t>
+            </a:r>
+            <a:r>
+              <a:rPr sz="3000" b="0">
+                <a:solidFill>
+                  <a:srgbClr val="1F2A44"/>
+                </a:solidFill>
+                <a:latin typeface="Nunito Sans"/>
+              </a:rPr>
+              <a:t>Mira dónde empieza el eje, qué fechas faltan y qué emoción buscan los colores.</a:t>
+            </a:r>
+          </a:p>
+          <a:p>
+            <a:pPr>
+              <a:spcAft>
+                <a:spcPts val="1350"/>
+              </a:spcAft>
+            </a:pPr>
+            <a:r>
+              <a:rPr sz="3000" b="1">
+                <a:solidFill>
+                  <a:srgbClr val="E8793A"/>
+                </a:solidFill>
+                <a:latin typeface="Nunito Sans"/>
+              </a:rPr>
+              <a:t>3. </a:t>
+            </a:r>
+            <a:r>
+              <a:rPr sz="3000" b="0">
+                <a:solidFill>
+                  <a:srgbClr val="1F2A44"/>
+                </a:solidFill>
+                <a:latin typeface="Nunito Sans"/>
+              </a:rPr>
+              <a:t>Un eje cortado exagera las barras, pero en temperaturas puede estar bien.</a:t>
             </a:r>
           </a:p>
         </p:txBody>
@@ -5558,7 +5304,7 @@
     <p:bg>
       <p:bgPr>
         <a:solidFill>
-          <a:srgbClr val="FBF7EF"/>
+          <a:srgbClr val="1F2A44"/>
         </a:solidFill>
         <a:effectLst/>
       </p:bgPr>
@@ -5600,11 +5346,11 @@
             <a:r>
               <a:rPr sz="1400" b="1">
                 <a:solidFill>
-                  <a:srgbClr val="E8793A"/>
-                </a:solidFill>
-                <a:latin typeface="Nunito Sans"/>
-              </a:rPr>
-              <a:t>LO DE HOY EN TRES LÍNEAS</a:t>
+                  <a:srgbClr val="F4B183"/>
+                </a:solidFill>
+                <a:latin typeface="Nunito Sans"/>
+              </a:rPr>
+              <a:t>VÍDEO</a:t>
             </a:r>
           </a:p>
         </p:txBody>
@@ -5617,8 +5363,8 @@
         </p:nvSpPr>
         <p:spPr>
           <a:xfrm>
-            <a:off x="640000" y="1300000"/>
-            <a:ext cx="10912000" cy="4800000"/>
+            <a:off x="640000" y="760000"/>
+            <a:ext cx="10912000" cy="800000"/>
           </a:xfrm>
           <a:prstGeom prst="rect">
             <a:avLst/>
@@ -5633,76 +5379,56 @@
           <a:p>
             <a:pPr>
               <a:spcAft>
-                <a:spcPts val="1350"/>
-              </a:spcAft>
-            </a:pPr>
-            <a:r>
-              <a:rPr sz="3000" b="1">
-                <a:solidFill>
-                  <a:srgbClr val="E8793A"/>
-                </a:solidFill>
-                <a:latin typeface="Nunito Sans"/>
-              </a:rPr>
-              <a:t>1. </a:t>
-            </a:r>
-            <a:r>
-              <a:rPr sz="3000" b="0">
-                <a:solidFill>
-                  <a:srgbClr val="1F2A44"/>
-                </a:solidFill>
-                <a:latin typeface="Nunito Sans"/>
-              </a:rPr>
-              <a:t>El ocio es tiempo libre que eliges tú para descansar, divertirte o aprender.</a:t>
-            </a:r>
-          </a:p>
-          <a:p>
-            <a:pPr>
-              <a:spcAft>
-                <a:spcPts val="1350"/>
-              </a:spcAft>
-            </a:pPr>
-            <a:r>
-              <a:rPr sz="3000" b="1">
-                <a:solidFill>
-                  <a:srgbClr val="E8793A"/>
-                </a:solidFill>
-                <a:latin typeface="Nunito Sans"/>
-              </a:rPr>
-              <a:t>2. </a:t>
-            </a:r>
-            <a:r>
-              <a:rPr sz="3000" b="0">
-                <a:solidFill>
-                  <a:srgbClr val="1F2A44"/>
-                </a:solidFill>
-                <a:latin typeface="Nunito Sans"/>
-              </a:rPr>
-              <a:t>Adicción es perder el control: sigues aunque haga daño. Puede ser con o sin sustancia.</a:t>
-            </a:r>
-          </a:p>
-          <a:p>
-            <a:pPr>
-              <a:spcAft>
-                <a:spcPts val="1350"/>
-              </a:spcAft>
-            </a:pPr>
-            <a:r>
-              <a:rPr sz="3000" b="1">
-                <a:solidFill>
-                  <a:srgbClr val="E8793A"/>
-                </a:solidFill>
-                <a:latin typeface="Nunito Sans"/>
-              </a:rPr>
-              <a:t>3. </a:t>
-            </a:r>
-            <a:r>
-              <a:rPr sz="3000" b="0">
-                <a:solidFill>
-                  <a:srgbClr val="1F2A44"/>
-                </a:solidFill>
-                <a:latin typeface="Nunito Sans"/>
-              </a:rPr>
-              <a:t>Ante un mito sobre drogas: ¿quién lo dice, cómo lo sabe y qué dicen las fuentes sanitarias?</a:t>
+                <a:spcPts val="1620"/>
+              </a:spcAft>
+            </a:pPr>
+            <a:r>
+              <a:rPr sz="3600" b="1">
+                <a:solidFill>
+                  <a:srgbClr val="FBF7EF"/>
+                </a:solidFill>
+                <a:latin typeface="Fredoka"/>
+              </a:rPr>
+              <a:t>Gráficos engañosos: ejes cortados y escalas</a:t>
+            </a:r>
+          </a:p>
+        </p:txBody>
+      </p:sp>
+      <p:sp>
+        <p:nvSpPr>
+          <p:cNvPr id="4" name="TextBox 3"/>
+          <p:cNvSpPr txBox="1"/>
+          <p:nvPr/>
+        </p:nvSpPr>
+        <p:spPr>
+          <a:xfrm>
+            <a:off x="640000" y="2200000"/>
+            <a:ext cx="10912000" cy="2000000"/>
+          </a:xfrm>
+          <a:prstGeom prst="rect">
+            <a:avLst/>
+          </a:prstGeom>
+          <a:noFill/>
+        </p:spPr>
+        <p:txBody>
+          <a:bodyPr wrap="square">
+            <a:spAutoFit/>
+          </a:bodyPr>
+          <a:lstStyle/>
+          <a:p>
+            <a:pPr>
+              <a:spcAft>
+                <a:spcPts val="1080"/>
+              </a:spcAft>
+            </a:pPr>
+            <a:r>
+              <a:rPr sz="2400" b="0">
+                <a:solidFill>
+                  <a:srgbClr val="C9D3E6"/>
+                </a:solidFill>
+                <a:latin typeface="Nunito Sans"/>
+              </a:rPr>
+              <a:t>Ver gráficos reales de noticias y anuncios con el eje cortado o las fechas recortadas.</a:t>
             </a:r>
           </a:p>
         </p:txBody>
@@ -5767,149 +5493,6 @@
                 </a:solidFill>
                 <a:latin typeface="Nunito Sans"/>
               </a:rPr>
-              <a:t>VÍDEO</a:t>
-            </a:r>
-          </a:p>
-        </p:txBody>
-      </p:sp>
-      <p:sp>
-        <p:nvSpPr>
-          <p:cNvPr id="3" name="TextBox 2"/>
-          <p:cNvSpPr txBox="1"/>
-          <p:nvPr/>
-        </p:nvSpPr>
-        <p:spPr>
-          <a:xfrm>
-            <a:off x="640000" y="760000"/>
-            <a:ext cx="10912000" cy="800000"/>
-          </a:xfrm>
-          <a:prstGeom prst="rect">
-            <a:avLst/>
-          </a:prstGeom>
-          <a:noFill/>
-        </p:spPr>
-        <p:txBody>
-          <a:bodyPr wrap="square">
-            <a:spAutoFit/>
-          </a:bodyPr>
-          <a:lstStyle/>
-          <a:p>
-            <a:pPr>
-              <a:spcAft>
-                <a:spcPts val="1620"/>
-              </a:spcAft>
-            </a:pPr>
-            <a:r>
-              <a:rPr sz="3600" b="1">
-                <a:solidFill>
-                  <a:srgbClr val="FBF7EF"/>
-                </a:solidFill>
-                <a:latin typeface="Fredoka"/>
-              </a:rPr>
-              <a:t>Qué es una adicción y qué dicen las fuentes sanitarias sobre el vapeo y el cannabis</a:t>
-            </a:r>
-          </a:p>
-        </p:txBody>
-      </p:sp>
-      <p:sp>
-        <p:nvSpPr>
-          <p:cNvPr id="4" name="TextBox 3"/>
-          <p:cNvSpPr txBox="1"/>
-          <p:nvPr/>
-        </p:nvSpPr>
-        <p:spPr>
-          <a:xfrm>
-            <a:off x="640000" y="2200000"/>
-            <a:ext cx="10912000" cy="2000000"/>
-          </a:xfrm>
-          <a:prstGeom prst="rect">
-            <a:avLst/>
-          </a:prstGeom>
-          <a:noFill/>
-        </p:spPr>
-        <p:txBody>
-          <a:bodyPr wrap="square">
-            <a:spAutoFit/>
-          </a:bodyPr>
-          <a:lstStyle/>
-          <a:p>
-            <a:pPr>
-              <a:spcAft>
-                <a:spcPts val="1080"/>
-              </a:spcAft>
-            </a:pPr>
-            <a:r>
-              <a:rPr sz="2400" b="0">
-                <a:solidFill>
-                  <a:srgbClr val="C9D3E6"/>
-                </a:solidFill>
-                <a:latin typeface="Nunito Sans"/>
-              </a:rPr>
-              <a:t>Contrastar los mitos con una fuente sanitaria fiable y repasar las señales de una adicción.</a:t>
-            </a:r>
-          </a:p>
-        </p:txBody>
-      </p:sp>
-    </p:spTree>
-  </p:cSld>
-  <p:clrMapOvr>
-    <a:masterClrMapping/>
-  </p:clrMapOvr>
-</p:sld>
-</file>
-
-<file path=ppt/slides/slide19.xml><?xml version="1.0" encoding="utf-8"?>
-<p:sld xmlns:a="http://schemas.openxmlformats.org/drawingml/2006/main" xmlns:p="http://schemas.openxmlformats.org/presentationml/2006/main" xmlns:r="http://schemas.openxmlformats.org/officeDocument/2006/relationships">
-  <p:cSld>
-    <p:bg>
-      <p:bgPr>
-        <a:solidFill>
-          <a:srgbClr val="1F2A44"/>
-        </a:solidFill>
-        <a:effectLst/>
-      </p:bgPr>
-    </p:bg>
-    <p:spTree>
-      <p:nvGrpSpPr>
-        <p:cNvPr id="1" name=""/>
-        <p:cNvGrpSpPr/>
-        <p:nvPr/>
-      </p:nvGrpSpPr>
-      <p:grpSpPr/>
-      <p:sp>
-        <p:nvSpPr>
-          <p:cNvPr id="2" name="TextBox 1"/>
-          <p:cNvSpPr txBox="1"/>
-          <p:nvPr/>
-        </p:nvSpPr>
-        <p:spPr>
-          <a:xfrm>
-            <a:off x="640000" y="380000"/>
-            <a:ext cx="10912000" cy="420000"/>
-          </a:xfrm>
-          <a:prstGeom prst="rect">
-            <a:avLst/>
-          </a:prstGeom>
-          <a:noFill/>
-        </p:spPr>
-        <p:txBody>
-          <a:bodyPr wrap="square">
-            <a:spAutoFit/>
-          </a:bodyPr>
-          <a:lstStyle/>
-          <a:p>
-            <a:pPr>
-              <a:spcAft>
-                <a:spcPts val="630"/>
-              </a:spcAft>
-            </a:pPr>
-            <a:r>
-              <a:rPr sz="1400" b="1">
-                <a:solidFill>
-                  <a:srgbClr val="F4B183"/>
-                </a:solidFill>
-                <a:latin typeface="Nunito Sans"/>
-              </a:rPr>
               <a:t>AHORA, LA HOJA DEL DÍA</a:t>
             </a:r>
           </a:p>
@@ -6503,7 +6086,7 @@
                 </a:solidFill>
                 <a:latin typeface="Nunito Sans"/>
               </a:rPr>
-              <a:t>La ropa es una ______ de identidad, no la persona entera.  (sesión 87)</a:t>
+              <a:t>En una etiqueta, «menos» azúcar no significa «______» azúcar.  (sesión 87)</a:t>
             </a:r>
           </a:p>
           <a:p>
@@ -6528,7 +6111,7 @@
                 </a:solidFill>
                 <a:latin typeface="Nunito Sans"/>
               </a:rPr>
-              <a:t>Una ______ es una forma de vestir, hablar o hacer que se extiende en un grupo durante un tiempo.  (sesión 87)</a:t>
+              <a:t>Un porcentaje dice cuántos hay de cada ______.  (sesión 87)</a:t>
             </a:r>
           </a:p>
           <a:p>
@@ -6553,7 +6136,7 @@
                 </a:solidFill>
                 <a:latin typeface="Nunito Sans"/>
               </a:rPr>
-              <a:t>Aunque hayas dicho que sí, puedes ______ de opinión en cualquier momento.  (sesión 83)</a:t>
+              <a:t>La ______ es el rechazo a las personas extranjeras por ser de fuera.  (sesión 83)</a:t>
             </a:r>
           </a:p>
         </p:txBody>
@@ -6705,7 +6288,7 @@
                 </a:solidFill>
                 <a:latin typeface="Nunito Sans"/>
               </a:rPr>
-              <a:t>La ropa es una </a:t>
+              <a:t>En una etiqueta, «menos» azúcar no significa «</a:t>
             </a:r>
             <a:r>
               <a:rPr sz="2600" b="1">
@@ -6714,7 +6297,7 @@
                 </a:solidFill>
                 <a:latin typeface="Nunito Sans"/>
               </a:rPr>
-              <a:t>señal</a:t>
+              <a:t>poco</a:t>
             </a:r>
             <a:r>
               <a:rPr sz="2600" b="0">
@@ -6723,7 +6306,7 @@
                 </a:solidFill>
                 <a:latin typeface="Nunito Sans"/>
               </a:rPr>
-              <a:t> de identidad, no la persona entera.  (sesión 87)</a:t>
+              <a:t>» azúcar.  (sesión 87)</a:t>
             </a:r>
           </a:p>
           <a:p>
@@ -6748,7 +6331,7 @@
                 </a:solidFill>
                 <a:latin typeface="Nunito Sans"/>
               </a:rPr>
-              <a:t>Una </a:t>
+              <a:t>Un porcentaje dice cuántos hay de cada </a:t>
             </a:r>
             <a:r>
               <a:rPr sz="2600" b="1">
@@ -6757,7 +6340,7 @@
                 </a:solidFill>
                 <a:latin typeface="Nunito Sans"/>
               </a:rPr>
-              <a:t>moda</a:t>
+              <a:t>100</a:t>
             </a:r>
             <a:r>
               <a:rPr sz="2600" b="0">
@@ -6766,7 +6349,7 @@
                 </a:solidFill>
                 <a:latin typeface="Nunito Sans"/>
               </a:rPr>
-              <a:t> es una forma de vestir, hablar o hacer que se extiende en un grupo durante un tiempo.  (sesión 87)</a:t>
+              <a:t>.  (sesión 87)</a:t>
             </a:r>
           </a:p>
           <a:p>
@@ -6791,7 +6374,7 @@
                 </a:solidFill>
                 <a:latin typeface="Nunito Sans"/>
               </a:rPr>
-              <a:t>Aunque hayas dicho que sí, puedes </a:t>
+              <a:t>La </a:t>
             </a:r>
             <a:r>
               <a:rPr sz="2600" b="1">
@@ -6800,7 +6383,7 @@
                 </a:solidFill>
                 <a:latin typeface="Nunito Sans"/>
               </a:rPr>
-              <a:t>cambiar</a:t>
+              <a:t>xenofobia</a:t>
             </a:r>
             <a:r>
               <a:rPr sz="2600" b="0">
@@ -6809,7 +6392,7 @@
                 </a:solidFill>
                 <a:latin typeface="Nunito Sans"/>
               </a:rPr>
-              <a:t> de opinión en cualquier momento.  (sesión 83)</a:t>
+              <a:t> es el rechazo a las personas extranjeras por ser de fuera.  (sesión 83)</a:t>
             </a:r>
           </a:p>
         </p:txBody>
@@ -6956,7 +6539,7 @@
                 </a:solidFill>
                 <a:latin typeface="Nunito Sans"/>
               </a:rPr>
-              <a:t>Un vídeo con muchas visitas: «Vapear no es fumar. Es solo vapor de agua con sabor a fresa». (Ejemplo inventado.)</a:t>
+              <a:t>Dos gráficos muestran las mismas ventas. En uno parece que se disparan. En el otro, que casi no cambian.</a:t>
             </a:r>
           </a:p>
         </p:txBody>
@@ -6995,7 +6578,7 @@
                 </a:solidFill>
                 <a:latin typeface="Nunito Sans"/>
               </a:rPr>
-              <a:t>¿Cómo podrías saber si es verdad?</a:t>
+              <a:t>¿Cómo puede ser, si los números son iguales?</a:t>
             </a:r>
           </a:p>
         </p:txBody>
@@ -7099,7 +6682,7 @@
                 </a:solidFill>
                 <a:latin typeface="Fredoka"/>
               </a:rPr>
-              <a:t>Ocio y adicción</a:t>
+              <a:t>Los trucos de los gráficos</a:t>
             </a:r>
           </a:p>
         </p:txBody>
@@ -7164,7 +6747,7 @@
                 </a:solidFill>
                 <a:latin typeface="Nunito Sans"/>
               </a:rPr>
-              <a:t>BLOQUE 1 · OCIO Y ADICCIÓN</a:t>
+              <a:t>BLOQUE 1 · LOS TRUCOS DE LOS GRÁFICOS</a:t>
             </a:r>
           </a:p>
         </p:txBody>
@@ -7203,7 +6786,7 @@
                 </a:solidFill>
                 <a:latin typeface="Fredoka"/>
               </a:rPr>
-              <a:t>Ocio</a:t>
+              <a:t>El eje</a:t>
             </a:r>
           </a:p>
         </p:txBody>
@@ -7285,7 +6868,7 @@
                 </a:solidFill>
                 <a:latin typeface="Nunito Sans"/>
               </a:rPr>
-              <a:t>Es el tiempo libre que usas en lo que tú eliges, para descansar, divertirte o aprender algo.</a:t>
+              <a:t>El eje vertical marca los valores del gráfico. En un gráfico de barras, lo normal es que empiece en 0.</a:t>
             </a:r>
           </a:p>
         </p:txBody>
@@ -7327,22 +6910,47 @@
               <a:t>• </a:t>
             </a:r>
             <a:r>
+              <a:rPr sz="2800" b="1">
+                <a:solidFill>
+                  <a:srgbClr val="1F2A44"/>
+                </a:solidFill>
+                <a:latin typeface="Nunito Sans"/>
+              </a:rPr>
+              <a:t>Eje cortado:</a:t>
+            </a:r>
+            <a:r>
               <a:rPr sz="2800" b="0">
                 <a:solidFill>
                   <a:srgbClr val="1F2A44"/>
                 </a:solidFill>
                 <a:latin typeface="Nunito Sans"/>
               </a:rPr>
-              <a:t>Una forma de verlo: tiene tres </a:t>
-            </a:r>
+              <a:t> empieza en otro número, por ejemplo en 90</a:t>
+            </a:r>
+          </a:p>
+          <a:p>
+            <a:pPr>
+              <a:spcAft>
+                <a:spcPts val="1260"/>
+              </a:spcAft>
+            </a:pPr>
             <a:r>
               <a:rPr sz="2800" b="1">
                 <a:solidFill>
+                  <a:srgbClr val="E8793A"/>
+                </a:solidFill>
+                <a:latin typeface="Nunito Sans"/>
+              </a:rPr>
+              <a:t>• </a:t>
+            </a:r>
+            <a:r>
+              <a:rPr sz="2800" b="0">
+                <a:solidFill>
                   <a:srgbClr val="1F2A44"/>
                 </a:solidFill>
                 <a:latin typeface="Nunito Sans"/>
               </a:rPr>
-              <a:t>elementos</a:t>
+              <a:t>Así, en las barras, diferencias pequeñas parecen enormes</a:t>
             </a:r>
           </a:p>
           <a:p>
@@ -7361,90 +6969,13 @@
               <a:t>• </a:t>
             </a:r>
             <a:r>
-              <a:rPr sz="2800" b="1">
+              <a:rPr sz="2800" b="0">
                 <a:solidFill>
                   <a:srgbClr val="1F2A44"/>
                 </a:solidFill>
                 <a:latin typeface="Nunito Sans"/>
               </a:rPr>
-              <a:t>Tiempo libre:</a:t>
-            </a:r>
-            <a:r>
-              <a:rPr sz="2800" b="0">
-                <a:solidFill>
-                  <a:srgbClr val="1F2A44"/>
-                </a:solidFill>
-                <a:latin typeface="Nunito Sans"/>
-              </a:rPr>
-              <a:t> fuera de clase, deberes y tareas</a:t>
-            </a:r>
-          </a:p>
-          <a:p>
-            <a:pPr>
-              <a:spcAft>
-                <a:spcPts val="1260"/>
-              </a:spcAft>
-            </a:pPr>
-            <a:r>
-              <a:rPr sz="2800" b="1">
-                <a:solidFill>
-                  <a:srgbClr val="E8793A"/>
-                </a:solidFill>
-                <a:latin typeface="Nunito Sans"/>
-              </a:rPr>
-              <a:t>• </a:t>
-            </a:r>
-            <a:r>
-              <a:rPr sz="2800" b="1">
-                <a:solidFill>
-                  <a:srgbClr val="1F2A44"/>
-                </a:solidFill>
-                <a:latin typeface="Nunito Sans"/>
-              </a:rPr>
-              <a:t>Elección:</a:t>
-            </a:r>
-            <a:r>
-              <a:rPr sz="2800" b="0">
-                <a:solidFill>
-                  <a:srgbClr val="1F2A44"/>
-                </a:solidFill>
-                <a:latin typeface="Nunito Sans"/>
-              </a:rPr>
-              <a:t> lo decides tú, nadie te obliga</a:t>
-            </a:r>
-          </a:p>
-          <a:p>
-            <a:pPr>
-              <a:spcAft>
-                <a:spcPts val="1260"/>
-              </a:spcAft>
-            </a:pPr>
-            <a:r>
-              <a:rPr sz="2800" b="1">
-                <a:solidFill>
-                  <a:srgbClr val="E8793A"/>
-                </a:solidFill>
-                <a:latin typeface="Nunito Sans"/>
-              </a:rPr>
-              <a:t>• </a:t>
-            </a:r>
-            <a:r>
-              <a:rPr sz="2800" b="1">
-                <a:solidFill>
-                  <a:srgbClr val="1F2A44"/>
-                </a:solidFill>
-                <a:latin typeface="Nunito Sans"/>
-              </a:rPr>
-              <a:t>Disfrute:</a:t>
-            </a:r>
-            <a:r>
-              <a:rPr sz="2800" b="0">
-                <a:solidFill>
-                  <a:srgbClr val="1F2A44"/>
-                </a:solidFill>
-                <a:latin typeface="Nunito Sans"/>
-              </a:rPr>
-              <a:t> te sienta bien, te divierte o te hace crecer</a:t>
+              <a:t>Mira siempre dónde empieza el eje</a:t>
             </a:r>
           </a:p>
         </p:txBody>
@@ -7509,7 +7040,7 @@
                 </a:solidFill>
                 <a:latin typeface="Nunito Sans"/>
               </a:rPr>
-              <a:t>BLOQUE 1 · OCIO Y ADICCIÓN</a:t>
+              <a:t>BLOQUE 1 · LOS TRUCOS DE LOS GRÁFICOS</a:t>
             </a:r>
           </a:p>
         </p:txBody>
@@ -7548,234 +7079,310 @@
                 </a:solidFill>
                 <a:latin typeface="Fredoka"/>
               </a:rPr>
-              <a:t>Adicción</a:t>
-            </a:r>
-          </a:p>
-        </p:txBody>
-      </p:sp>
-      <p:sp>
-        <p:nvSpPr>
-          <p:cNvPr id="4" name="Rectangle 3"/>
-          <p:cNvSpPr/>
+              <a:t>Mismos puntos, eje distinto (ejemplo inventado)</a:t>
+            </a:r>
+          </a:p>
+        </p:txBody>
+      </p:sp>
+      <p:graphicFrame>
+        <p:nvGraphicFramePr>
+          <p:cNvPr id="4" name="Table 3"/>
+          <p:cNvGraphicFramePr>
+            <a:graphicFrameLocks noGrp="1"/>
+          </p:cNvGraphicFramePr>
           <p:nvPr/>
-        </p:nvSpPr>
-        <p:spPr>
-          <a:xfrm>
-            <a:off x="640000" y="1650000"/>
-            <a:ext cx="10912000" cy="1150000"/>
-          </a:xfrm>
-          <a:prstGeom prst="rect">
-            <a:avLst/>
-          </a:prstGeom>
-          <a:solidFill>
-            <a:srgbClr val="EAF0F7"/>
-          </a:solidFill>
-          <a:ln>
-            <a:noFill/>
-          </a:ln>
-        </p:spPr>
-        <p:style>
-          <a:lnRef idx="1">
-            <a:schemeClr val="accent1"/>
-          </a:lnRef>
-          <a:fillRef idx="3">
-            <a:schemeClr val="accent1"/>
-          </a:fillRef>
-          <a:effectRef idx="2">
-            <a:schemeClr val="accent1"/>
-          </a:effectRef>
-          <a:fontRef idx="minor">
-            <a:schemeClr val="lt1"/>
-          </a:fontRef>
-        </p:style>
-        <p:txBody>
-          <a:bodyPr rtlCol="0" anchor="ctr"/>
-          <a:lstStyle/>
-          <a:p>
-            <a:pPr algn="ctr"/>
-          </a:p>
-        </p:txBody>
-      </p:sp>
-      <p:sp>
-        <p:nvSpPr>
-          <p:cNvPr id="5" name="TextBox 4"/>
-          <p:cNvSpPr txBox="1"/>
-          <p:nvPr/>
-        </p:nvSpPr>
-        <p:spPr>
-          <a:xfrm>
-            <a:off x="840000" y="1730000"/>
-            <a:ext cx="10512000" cy="1000000"/>
-          </a:xfrm>
-          <a:prstGeom prst="rect">
-            <a:avLst/>
-          </a:prstGeom>
-          <a:noFill/>
-        </p:spPr>
-        <p:txBody>
-          <a:bodyPr wrap="square" anchor="ctr">
-            <a:spAutoFit/>
-          </a:bodyPr>
-          <a:lstStyle/>
-          <a:p>
-            <a:pPr>
-              <a:spcAft>
-                <a:spcPts val="1260"/>
-              </a:spcAft>
-            </a:pPr>
-            <a:r>
-              <a:rPr sz="2800" b="1">
-                <a:solidFill>
-                  <a:srgbClr val="1F2A44"/>
-                </a:solidFill>
-                <a:latin typeface="Nunito Sans"/>
-              </a:rPr>
-              <a:t>Es perder el control sobre un consumo o una conducta: sigues aunque te haga daño y te cuesta mucho parar.</a:t>
-            </a:r>
-          </a:p>
-        </p:txBody>
-      </p:sp>
-      <p:sp>
-        <p:nvSpPr>
-          <p:cNvPr id="6" name="TextBox 5"/>
-          <p:cNvSpPr txBox="1"/>
-          <p:nvPr/>
-        </p:nvSpPr>
-        <p:spPr>
-          <a:xfrm>
-            <a:off x="640000" y="3000000"/>
-            <a:ext cx="10912000" cy="3458000"/>
-          </a:xfrm>
-          <a:prstGeom prst="rect">
-            <a:avLst/>
-          </a:prstGeom>
-          <a:noFill/>
-        </p:spPr>
-        <p:txBody>
-          <a:bodyPr wrap="square">
-            <a:spAutoFit/>
-          </a:bodyPr>
-          <a:lstStyle/>
-          <a:p>
-            <a:pPr>
-              <a:spcAft>
-                <a:spcPts val="1260"/>
-              </a:spcAft>
-            </a:pPr>
-            <a:r>
-              <a:rPr sz="2800" b="1">
-                <a:solidFill>
-                  <a:srgbClr val="E8793A"/>
-                </a:solidFill>
-                <a:latin typeface="Nunito Sans"/>
-              </a:rPr>
-              <a:t>• </a:t>
-            </a:r>
-            <a:r>
-              <a:rPr sz="2800" b="1">
-                <a:solidFill>
-                  <a:srgbClr val="1F2A44"/>
-                </a:solidFill>
-                <a:latin typeface="Nunito Sans"/>
-              </a:rPr>
-              <a:t>Con sustancia:</a:t>
-            </a:r>
-            <a:r>
-              <a:rPr sz="2800" b="0">
-                <a:solidFill>
-                  <a:srgbClr val="1F2A44"/>
-                </a:solidFill>
-                <a:latin typeface="Nunito Sans"/>
-              </a:rPr>
-              <a:t> alcohol, nicotina (tabaco y vapeo), cannabis…</a:t>
-            </a:r>
-          </a:p>
-          <a:p>
-            <a:pPr>
-              <a:spcAft>
-                <a:spcPts val="1260"/>
-              </a:spcAft>
-            </a:pPr>
-            <a:r>
-              <a:rPr sz="2800" b="1">
-                <a:solidFill>
-                  <a:srgbClr val="E8793A"/>
-                </a:solidFill>
-                <a:latin typeface="Nunito Sans"/>
-              </a:rPr>
-              <a:t>• </a:t>
-            </a:r>
-            <a:r>
-              <a:rPr sz="2800" b="1">
-                <a:solidFill>
-                  <a:srgbClr val="1F2A44"/>
-                </a:solidFill>
-                <a:latin typeface="Nunito Sans"/>
-              </a:rPr>
-              <a:t>Sin sustancia:</a:t>
-            </a:r>
-            <a:r>
-              <a:rPr sz="2800" b="0">
-                <a:solidFill>
-                  <a:srgbClr val="1F2A44"/>
-                </a:solidFill>
-                <a:latin typeface="Nunito Sans"/>
-              </a:rPr>
-              <a:t> apuestas, videojuegos</a:t>
-            </a:r>
-          </a:p>
-          <a:p>
-            <a:pPr>
-              <a:spcAft>
-                <a:spcPts val="1260"/>
-              </a:spcAft>
-            </a:pPr>
-            <a:r>
-              <a:rPr sz="2800" b="1">
-                <a:solidFill>
-                  <a:srgbClr val="E8793A"/>
-                </a:solidFill>
-                <a:latin typeface="Nunito Sans"/>
-              </a:rPr>
-              <a:t>• </a:t>
-            </a:r>
-            <a:r>
-              <a:rPr sz="2800" b="0">
-                <a:solidFill>
-                  <a:srgbClr val="1F2A44"/>
-                </a:solidFill>
-                <a:latin typeface="Nunito Sans"/>
-              </a:rPr>
-              <a:t>La OMS reconoce el trastorno por juego de apuestas y por videojuegos</a:t>
-            </a:r>
-          </a:p>
-          <a:p>
-            <a:pPr>
-              <a:spcAft>
-                <a:spcPts val="1260"/>
-              </a:spcAft>
-            </a:pPr>
-            <a:r>
-              <a:rPr sz="2800" b="1">
-                <a:solidFill>
-                  <a:srgbClr val="E8793A"/>
-                </a:solidFill>
-                <a:latin typeface="Nunito Sans"/>
-              </a:rPr>
-              <a:t>• </a:t>
-            </a:r>
-            <a:r>
-              <a:rPr sz="2800" b="0">
-                <a:solidFill>
-                  <a:srgbClr val="1F2A44"/>
-                </a:solidFill>
-                <a:latin typeface="Nunito Sans"/>
-              </a:rPr>
-              <a:t>«Adicción al móvil» no es un diagnóstico oficial: se dice «uso problemático»</a:t>
-            </a:r>
-          </a:p>
-        </p:txBody>
-      </p:sp>
+        </p:nvGraphicFramePr>
+        <p:xfrm>
+          <a:off x="640000" y="1700000"/>
+          <a:ext cx="10912000" cy="2400000"/>
+        </p:xfrm>
+        <a:graphic>
+          <a:graphicData uri="http://schemas.openxmlformats.org/drawingml/2006/table">
+            <a:tbl>
+              <a:tblPr firstRow="1" bandRow="1">
+                <a:tableStyleId>{5C22544A-7EE6-4342-B048-85BDC9FD1C3A}</a:tableStyleId>
+              </a:tblPr>
+              <a:tblGrid>
+                <a:gridCol w="3637333"/>
+                <a:gridCol w="3637333"/>
+                <a:gridCol w="3637334"/>
+              </a:tblGrid>
+              <a:tr h="600000">
+                <a:tc>
+                  <a:txBody>
+                    <a:bodyPr/>
+                    <a:lstStyle/>
+                    <a:p>
+                      <a:r>
+                        <a:rPr sz="2000" b="1">
+                          <a:solidFill>
+                            <a:srgbClr val="FBF7EF"/>
+                          </a:solidFill>
+                          <a:latin typeface="Fredoka"/>
+                        </a:rPr>
+                        <a:t>Puntos en un videojuego</a:t>
+                      </a:r>
+                    </a:p>
+                  </a:txBody>
+                  <a:tcPr>
+                    <a:solidFill>
+                      <a:srgbClr val="1F2A44"/>
+                    </a:solidFill>
+                  </a:tcPr>
+                </a:tc>
+                <a:tc>
+                  <a:txBody>
+                    <a:bodyPr/>
+                    <a:lstStyle/>
+                    <a:p>
+                      <a:r>
+                        <a:rPr sz="2000" b="1">
+                          <a:solidFill>
+                            <a:srgbClr val="FBF7EF"/>
+                          </a:solidFill>
+                          <a:latin typeface="Fredoka"/>
+                        </a:rPr>
+                        <a:t>Eje de 0 a 100</a:t>
+                      </a:r>
+                    </a:p>
+                  </a:txBody>
+                  <a:tcPr>
+                    <a:solidFill>
+                      <a:srgbClr val="1F2A44"/>
+                    </a:solidFill>
+                  </a:tcPr>
+                </a:tc>
+                <a:tc>
+                  <a:txBody>
+                    <a:bodyPr/>
+                    <a:lstStyle/>
+                    <a:p>
+                      <a:r>
+                        <a:rPr sz="2000" b="1">
+                          <a:solidFill>
+                            <a:srgbClr val="FBF7EF"/>
+                          </a:solidFill>
+                          <a:latin typeface="Fredoka"/>
+                        </a:rPr>
+                        <a:t>Eje de 90 a 100</a:t>
+                      </a:r>
+                    </a:p>
+                  </a:txBody>
+                  <a:tcPr>
+                    <a:solidFill>
+                      <a:srgbClr val="1F2A44"/>
+                    </a:solidFill>
+                  </a:tcPr>
+                </a:tc>
+              </a:tr>
+              <a:tr h="600000">
+                <a:tc>
+                  <a:txBody>
+                    <a:bodyPr/>
+                    <a:lstStyle/>
+                    <a:p>
+                      <a:r>
+                        <a:rPr sz="2000" b="0">
+                          <a:solidFill>
+                            <a:srgbClr val="1F2A44"/>
+                          </a:solidFill>
+                          <a:latin typeface="Nunito Sans"/>
+                        </a:rPr>
+                        <a:t>Una chica: 92 puntos</a:t>
+                      </a:r>
+                    </a:p>
+                  </a:txBody>
+                  <a:tcPr>
+                    <a:solidFill>
+                      <a:srgbClr val="FFFFFF"/>
+                    </a:solidFill>
+                  </a:tcPr>
+                </a:tc>
+                <a:tc>
+                  <a:txBody>
+                    <a:bodyPr/>
+                    <a:lstStyle/>
+                    <a:p>
+                      <a:r>
+                        <a:rPr sz="2000" b="0">
+                          <a:solidFill>
+                            <a:srgbClr val="1F2A44"/>
+                          </a:solidFill>
+                          <a:latin typeface="Nunito Sans"/>
+                        </a:rPr>
+                        <a:t>Barra llena al 92 %</a:t>
+                      </a:r>
+                    </a:p>
+                  </a:txBody>
+                  <a:tcPr>
+                    <a:solidFill>
+                      <a:srgbClr val="FFFFFF"/>
+                    </a:solidFill>
+                  </a:tcPr>
+                </a:tc>
+                <a:tc>
+                  <a:txBody>
+                    <a:bodyPr/>
+                    <a:lstStyle/>
+                    <a:p>
+                      <a:r>
+                        <a:rPr sz="2000" b="0">
+                          <a:solidFill>
+                            <a:srgbClr val="1F2A44"/>
+                          </a:solidFill>
+                          <a:latin typeface="Nunito Sans"/>
+                        </a:rPr>
+                        <a:t>Barra llena al 20 %</a:t>
+                      </a:r>
+                    </a:p>
+                  </a:txBody>
+                  <a:tcPr>
+                    <a:solidFill>
+                      <a:srgbClr val="FFFFFF"/>
+                    </a:solidFill>
+                  </a:tcPr>
+                </a:tc>
+              </a:tr>
+              <a:tr h="600000">
+                <a:tc>
+                  <a:txBody>
+                    <a:bodyPr/>
+                    <a:lstStyle/>
+                    <a:p>
+                      <a:r>
+                        <a:rPr sz="2000" b="0">
+                          <a:solidFill>
+                            <a:srgbClr val="1F2A44"/>
+                          </a:solidFill>
+                          <a:latin typeface="Nunito Sans"/>
+                        </a:rPr>
+                        <a:t>Un chico: 98 puntos</a:t>
+                      </a:r>
+                    </a:p>
+                  </a:txBody>
+                  <a:tcPr>
+                    <a:solidFill>
+                      <a:srgbClr val="EAF0F7"/>
+                    </a:solidFill>
+                  </a:tcPr>
+                </a:tc>
+                <a:tc>
+                  <a:txBody>
+                    <a:bodyPr/>
+                    <a:lstStyle/>
+                    <a:p>
+                      <a:r>
+                        <a:rPr sz="2000" b="0">
+                          <a:solidFill>
+                            <a:srgbClr val="1F2A44"/>
+                          </a:solidFill>
+                          <a:latin typeface="Nunito Sans"/>
+                        </a:rPr>
+                        <a:t>Barra llena al 98 %</a:t>
+                      </a:r>
+                    </a:p>
+                  </a:txBody>
+                  <a:tcPr>
+                    <a:solidFill>
+                      <a:srgbClr val="EAF0F7"/>
+                    </a:solidFill>
+                  </a:tcPr>
+                </a:tc>
+                <a:tc>
+                  <a:txBody>
+                    <a:bodyPr/>
+                    <a:lstStyle/>
+                    <a:p>
+                      <a:r>
+                        <a:rPr sz="2000" b="0">
+                          <a:solidFill>
+                            <a:srgbClr val="1F2A44"/>
+                          </a:solidFill>
+                          <a:latin typeface="Nunito Sans"/>
+                        </a:rPr>
+                        <a:t>Barra llena al 80 %</a:t>
+                      </a:r>
+                    </a:p>
+                  </a:txBody>
+                  <a:tcPr>
+                    <a:solidFill>
+                      <a:srgbClr val="EAF0F7"/>
+                    </a:solidFill>
+                  </a:tcPr>
+                </a:tc>
+              </a:tr>
+              <a:tr h="600000">
+                <a:tc>
+                  <a:txBody>
+                    <a:bodyPr/>
+                    <a:lstStyle/>
+                    <a:p>
+                      <a:r>
+                        <a:rPr sz="2000" b="0">
+                          <a:solidFill>
+                            <a:srgbClr val="1F2A44"/>
+                          </a:solidFill>
+                          <a:latin typeface="Nunito Sans"/>
+                        </a:rPr>
+                        <a:t>¿Qué parece?</a:t>
+                      </a:r>
+                    </a:p>
+                  </a:txBody>
+                  <a:tcPr>
+                    <a:solidFill>
+                      <a:srgbClr val="FFFFFF"/>
+                    </a:solidFill>
+                  </a:tcPr>
+                </a:tc>
+                <a:tc>
+                  <a:txBody>
+                    <a:bodyPr/>
+                    <a:lstStyle/>
+                    <a:p>
+                      <a:r>
+                        <a:rPr sz="2000" b="0">
+                          <a:solidFill>
+                            <a:srgbClr val="1F2A44"/>
+                          </a:solidFill>
+                          <a:latin typeface="Nunito Sans"/>
+                        </a:rPr>
+                        <a:t>Casi iguales</a:t>
+                      </a:r>
+                    </a:p>
+                  </a:txBody>
+                  <a:tcPr>
+                    <a:solidFill>
+                      <a:srgbClr val="FFFFFF"/>
+                    </a:solidFill>
+                  </a:tcPr>
+                </a:tc>
+                <a:tc>
+                  <a:txBody>
+                    <a:bodyPr/>
+                    <a:lstStyle/>
+                    <a:p>
+                      <a:r>
+                        <a:rPr sz="2000" b="0">
+                          <a:solidFill>
+                            <a:srgbClr val="1F2A44"/>
+                          </a:solidFill>
+                          <a:latin typeface="Nunito Sans"/>
+                        </a:rPr>
+                        <a:t>¡El chico tiene cuatro veces más!</a:t>
+                      </a:r>
+                    </a:p>
+                  </a:txBody>
+                  <a:tcPr>
+                    <a:solidFill>
+                      <a:srgbClr val="FFFFFF"/>
+                    </a:solidFill>
+                  </a:tcPr>
+                </a:tc>
+              </a:tr>
+            </a:tbl>
+          </a:graphicData>
+        </a:graphic>
+      </p:graphicFrame>
     </p:spTree>
   </p:cSld>
   <p:clrMapOvr>
@@ -7836,7 +7443,7 @@
                 </a:solidFill>
                 <a:latin typeface="Nunito Sans"/>
               </a:rPr>
-              <a:t>BLOQUE 1 · OCIO Y ADICCIÓN</a:t>
+              <a:t>BLOQUE 1 · LOS TRUCOS DE LOS GRÁFICOS</a:t>
             </a:r>
           </a:p>
         </p:txBody>
@@ -7875,7 +7482,7 @@
                 </a:solidFill>
                 <a:latin typeface="Fredoka"/>
               </a:rPr>
-              <a:t>Señales de adicción</a:t>
+              <a:t>Otros trucos</a:t>
             </a:r>
           </a:p>
         </p:txBody>
@@ -7888,8 +7495,8 @@
         </p:nvSpPr>
         <p:spPr>
           <a:xfrm>
-            <a:off x="840000" y="1730000"/>
-            <a:ext cx="10512000" cy="1000000"/>
+            <a:off x="640000" y="1650000"/>
+            <a:ext cx="10912000" cy="4808000"/>
           </a:xfrm>
           <a:prstGeom prst="rect">
             <a:avLst/>
@@ -7897,45 +7504,6 @@
           <a:noFill/>
         </p:spPr>
         <p:txBody>
-          <a:bodyPr wrap="square" anchor="ctr">
-            <a:spAutoFit/>
-          </a:bodyPr>
-          <a:lstStyle/>
-          <a:p>
-            <a:pPr>
-              <a:spcAft>
-                <a:spcPts val="1080"/>
-              </a:spcAft>
-            </a:pPr>
-            <a:r>
-              <a:rPr sz="2400" b="0">
-                <a:solidFill>
-                  <a:srgbClr val="1F2A44"/>
-                </a:solidFill>
-                <a:latin typeface="Nunito Sans"/>
-              </a:rPr>
-              <a:t>Los médicos no miran solo las horas. Miran señales como estas:</a:t>
-            </a:r>
-          </a:p>
-        </p:txBody>
-      </p:sp>
-      <p:sp>
-        <p:nvSpPr>
-          <p:cNvPr id="5" name="TextBox 4"/>
-          <p:cNvSpPr txBox="1"/>
-          <p:nvPr/>
-        </p:nvSpPr>
-        <p:spPr>
-          <a:xfrm>
-            <a:off x="640000" y="3000000"/>
-            <a:ext cx="10912000" cy="3458000"/>
-          </a:xfrm>
-          <a:prstGeom prst="rect">
-            <a:avLst/>
-          </a:prstGeom>
-          <a:noFill/>
-        </p:spPr>
-        <p:txBody>
           <a:bodyPr wrap="square">
             <a:spAutoFit/>
           </a:bodyPr>
@@ -7962,7 +7530,7 @@
                 </a:solidFill>
                 <a:latin typeface="Nunito Sans"/>
               </a:rPr>
-              <a:t>Pérdida de control:</a:t>
+              <a:t>Escala estirada o aplastada:</a:t>
             </a:r>
             <a:r>
               <a:rPr sz="2800" b="0">
@@ -7971,7 +7539,7 @@
                 </a:solidFill>
                 <a:latin typeface="Nunito Sans"/>
               </a:rPr>
-              <a:t> quieres parar y no puedes</a:t>
+              <a:t> la misma subida parece un muro o una llanura</a:t>
             </a:r>
           </a:p>
           <a:p>
@@ -7996,7 +7564,7 @@
                 </a:solidFill>
                 <a:latin typeface="Nunito Sans"/>
               </a:rPr>
-              <a:t>Seguir aunque haga daño:</a:t>
+              <a:t>Dibujos que crecen en ancho y alto:</a:t>
             </a:r>
             <a:r>
               <a:rPr sz="2800" b="0">
@@ -8005,7 +7573,7 @@
                 </a:solidFill>
                 <a:latin typeface="Nunito Sans"/>
               </a:rPr>
-              <a:t> al sueño, a los estudios, a la familia</a:t>
+              <a:t> el doble parece cuatro veces más</a:t>
             </a:r>
           </a:p>
           <a:p>
@@ -8030,7 +7598,7 @@
                 </a:solidFill>
                 <a:latin typeface="Nunito Sans"/>
               </a:rPr>
-              <a:t>Tolerancia:</a:t>
+              <a:t>Colores:</a:t>
             </a:r>
             <a:r>
               <a:rPr sz="2800" b="0">
@@ -8039,7 +7607,7 @@
                 </a:solidFill>
                 <a:latin typeface="Nunito Sans"/>
               </a:rPr>
-              <a:t> necesitas más para sentir lo mismo</a:t>
+              <a:t> el rojo asusta aunque el dato sea pequeño</a:t>
             </a:r>
           </a:p>
           <a:p>
@@ -8064,7 +7632,7 @@
                 </a:solidFill>
                 <a:latin typeface="Nunito Sans"/>
               </a:rPr>
-              <a:t>Abstinencia:</a:t>
+              <a:t>Recortar fechas:</a:t>
             </a:r>
             <a:r>
               <a:rPr sz="2800" b="0">
@@ -8073,32 +7641,7 @@
                 </a:solidFill>
                 <a:latin typeface="Nunito Sans"/>
               </a:rPr>
-              <a:t> malestar, nervios o mal humor al dejarlo</a:t>
-            </a:r>
-          </a:p>
-          <a:p>
-            <a:pPr>
-              <a:spcAft>
-                <a:spcPts val="1260"/>
-              </a:spcAft>
-            </a:pPr>
-            <a:r>
-              <a:rPr sz="2800" b="1">
-                <a:solidFill>
-                  <a:srgbClr val="E8793A"/>
-                </a:solidFill>
-                <a:latin typeface="Nunito Sans"/>
-              </a:rPr>
-              <a:t>• </a:t>
-            </a:r>
-            <a:r>
-              <a:rPr sz="2800" b="0">
-                <a:solidFill>
-                  <a:srgbClr val="1F2A44"/>
-                </a:solidFill>
-                <a:latin typeface="Nunito Sans"/>
-              </a:rPr>
-              <a:t>Todo gira alrededor de eso y deja fuera lo demás</a:t>
+              <a:t> enseñar solo los meses que convienen</a:t>
             </a:r>
           </a:p>
         </p:txBody>
@@ -8117,7 +7660,7 @@
     <p:bg>
       <p:bgPr>
         <a:solidFill>
-          <a:srgbClr val="1F2A44"/>
+          <a:srgbClr val="FBF7EF"/>
         </a:solidFill>
         <a:effectLst/>
       </p:bgPr>
@@ -8137,8 +7680,8 @@
         </p:nvSpPr>
         <p:spPr>
           <a:xfrm>
-            <a:off x="640000" y="2300000"/>
-            <a:ext cx="10912000" cy="500000"/>
+            <a:off x="640000" y="380000"/>
+            <a:ext cx="10912000" cy="420000"/>
           </a:xfrm>
           <a:prstGeom prst="rect">
             <a:avLst/>
@@ -8153,17 +7696,17 @@
           <a:p>
             <a:pPr>
               <a:spcAft>
-                <a:spcPts val="810"/>
-              </a:spcAft>
-            </a:pPr>
-            <a:r>
-              <a:rPr sz="1800" b="1">
-                <a:solidFill>
-                  <a:srgbClr val="F4B183"/>
-                </a:solidFill>
-                <a:latin typeface="Nunito Sans"/>
-              </a:rPr>
-              <a:t>BLOQUE 2</a:t>
+                <a:spcPts val="630"/>
+              </a:spcAft>
+            </a:pPr>
+            <a:r>
+              <a:rPr sz="1400" b="1">
+                <a:solidFill>
+                  <a:srgbClr val="E8793A"/>
+                </a:solidFill>
+                <a:latin typeface="Nunito Sans"/>
+              </a:rPr>
+              <a:t>BLOQUE 1 · LOS TRUCOS DE LOS GRÁFICOS</a:t>
             </a:r>
           </a:p>
         </p:txBody>
@@ -8176,7 +7719,7 @@
         </p:nvSpPr>
         <p:spPr>
           <a:xfrm>
-            <a:off x="640000" y="2800000"/>
+            <a:off x="640000" y="760000"/>
             <a:ext cx="10912000" cy="800000"/>
           </a:xfrm>
           <a:prstGeom prst="rect">
@@ -8192,17 +7735,140 @@
           <a:p>
             <a:pPr>
               <a:spcAft>
-                <a:spcPts val="2160"/>
-              </a:spcAft>
-            </a:pPr>
-            <a:r>
-              <a:rPr sz="4800" b="1">
-                <a:solidFill>
-                  <a:srgbClr val="FBF7EF"/>
+                <a:spcPts val="1710"/>
+              </a:spcAft>
+            </a:pPr>
+            <a:r>
+              <a:rPr sz="3800" b="1">
+                <a:solidFill>
+                  <a:srgbClr val="1F2A44"/>
                 </a:solidFill>
                 <a:latin typeface="Fredoka"/>
               </a:rPr>
-              <a:t>Mitos y presión del grupo</a:t>
+              <a:t>Antes de creerte un gráfico</a:t>
+            </a:r>
+          </a:p>
+        </p:txBody>
+      </p:sp>
+      <p:sp>
+        <p:nvSpPr>
+          <p:cNvPr id="4" name="TextBox 3"/>
+          <p:cNvSpPr txBox="1"/>
+          <p:nvPr/>
+        </p:nvSpPr>
+        <p:spPr>
+          <a:xfrm>
+            <a:off x="640000" y="1650000"/>
+            <a:ext cx="10912000" cy="4808000"/>
+          </a:xfrm>
+          <a:prstGeom prst="rect">
+            <a:avLst/>
+          </a:prstGeom>
+          <a:noFill/>
+        </p:spPr>
+        <p:txBody>
+          <a:bodyPr wrap="square">
+            <a:spAutoFit/>
+          </a:bodyPr>
+          <a:lstStyle/>
+          <a:p>
+            <a:pPr>
+              <a:spcAft>
+                <a:spcPts val="1260"/>
+              </a:spcAft>
+            </a:pPr>
+            <a:r>
+              <a:rPr sz="2800" b="1">
+                <a:solidFill>
+                  <a:srgbClr val="E8793A"/>
+                </a:solidFill>
+                <a:latin typeface="Nunito Sans"/>
+              </a:rPr>
+              <a:t>• </a:t>
+            </a:r>
+            <a:r>
+              <a:rPr sz="2800" b="0">
+                <a:solidFill>
+                  <a:srgbClr val="1F2A44"/>
+                </a:solidFill>
+                <a:latin typeface="Nunito Sans"/>
+              </a:rPr>
+              <a:t>¿Dónde empieza el eje?</a:t>
+            </a:r>
+          </a:p>
+          <a:p>
+            <a:pPr>
+              <a:spcAft>
+                <a:spcPts val="1260"/>
+              </a:spcAft>
+            </a:pPr>
+            <a:r>
+              <a:rPr sz="2800" b="1">
+                <a:solidFill>
+                  <a:srgbClr val="E8793A"/>
+                </a:solidFill>
+                <a:latin typeface="Nunito Sans"/>
+              </a:rPr>
+              <a:t>• </a:t>
+            </a:r>
+            <a:r>
+              <a:rPr sz="2800" b="0">
+                <a:solidFill>
+                  <a:srgbClr val="1F2A44"/>
+                </a:solidFill>
+                <a:latin typeface="Nunito Sans"/>
+              </a:rPr>
+              <a:t>¿Qué fechas o datos faltan?</a:t>
+            </a:r>
+          </a:p>
+          <a:p>
+            <a:pPr>
+              <a:spcAft>
+                <a:spcPts val="1260"/>
+              </a:spcAft>
+            </a:pPr>
+            <a:r>
+              <a:rPr sz="2800" b="1">
+                <a:solidFill>
+                  <a:srgbClr val="E8793A"/>
+                </a:solidFill>
+                <a:latin typeface="Nunito Sans"/>
+              </a:rPr>
+              <a:t>• </a:t>
+            </a:r>
+            <a:r>
+              <a:rPr sz="2800" b="0">
+                <a:solidFill>
+                  <a:srgbClr val="1F2A44"/>
+                </a:solidFill>
+                <a:latin typeface="Nunito Sans"/>
+              </a:rPr>
+              <a:t>¿Qué dicen los números, no el dibujo?</a:t>
+            </a:r>
+          </a:p>
+          <a:p>
+            <a:pPr>
+              <a:spcAft>
+                <a:spcPts val="1260"/>
+              </a:spcAft>
+            </a:pPr>
+            <a:r>
+              <a:rPr sz="2800" b="1">
+                <a:solidFill>
+                  <a:srgbClr val="E8793A"/>
+                </a:solidFill>
+                <a:latin typeface="Nunito Sans"/>
+              </a:rPr>
+              <a:t>• </a:t>
+            </a:r>
+            <a:r>
+              <a:rPr sz="2800" b="0">
+                <a:solidFill>
+                  <a:srgbClr val="1F2A44"/>
+                </a:solidFill>
+                <a:latin typeface="Nunito Sans"/>
+              </a:rPr>
+              <a:t>¿Quién ha hecho el gráfico y qué gana? (sesión 32)</a:t>
             </a:r>
           </a:p>
         </p:txBody>
